--- a/content/05-teaching-resources/slides/specialism/13-technical-documentation-and-communication.pptx
+++ b/content/05-teaching-resources/slides/specialism/13-technical-documentation-and-communication.pptx
@@ -13,6 +13,10 @@
     <p:sldId id="261" r:id="rId13"/>
     <p:sldId id="262" r:id="rId14"/>
     <p:sldId id="263" r:id="rId15"/>
+    <p:sldId id="264" r:id="rId16"/>
+    <p:sldId id="265" r:id="rId17"/>
+    <p:sldId id="266" r:id="rId18"/>
+    <p:sldId id="267" r:id="rId19"/>
   </p:sldIdLst>
   <p:sldSz cx="12191695" cy="6858000" type="screen4x3"/>
   <p:notesSz cx="6858000" cy="9144000"/>
@@ -509,7 +513,22 @@
           <a:lstStyle/>
           <a:p>
             <a:r>
-              <a:t>Give students a few minutes to answer on mini whiteboards or paper, then reveal the answers on the next slide.</a:t>
+              <a:t>Answers:</a:t>
+            </a:r>
+          </a:p>
+          <a:p>
+            <a:r>
+              <a:t>1. Showing which version of a drawing is current.</a:t>
+            </a:r>
+          </a:p>
+          <a:p>
+            <a:r>
+              <a:t>2. E.g. CAD, document management systems, SharePoint.</a:t>
+            </a:r>
+          </a:p>
+          <a:p>
+            <a:r>
+              <a:t>3. Specifying how smooth a surface must be.</a:t>
             </a:r>
           </a:p>
         </p:txBody>
@@ -579,7 +598,22 @@
           <a:lstStyle/>
           <a:p>
             <a:r>
-              <a:t>Talk through any answers the class found difficult.</a:t>
+              <a:t>Answers:</a:t>
+            </a:r>
+          </a:p>
+          <a:p>
+            <a:r>
+              <a:t>1. E.g. sketches, drawings, models, reports.</a:t>
+            </a:r>
+          </a:p>
+          <a:p>
+            <a:r>
+              <a:t>2. Cost, time, availability, end user, project scale.</a:t>
+            </a:r>
+          </a:p>
+          <a:p>
+            <a:r>
+              <a:t>3. So others can follow and trust the decisions.</a:t>
             </a:r>
           </a:p>
         </p:txBody>
@@ -605,6 +639,146 @@
 </file>
 
 <file path=ppt/notesSlides/notesSlide3.xml><?xml version="1.0" encoding="utf-8"?>
+<p:notes xmlns:a="http://schemas.openxmlformats.org/drawingml/2006/main" xmlns:p="http://schemas.openxmlformats.org/presentationml/2006/main" xmlns:r="http://schemas.openxmlformats.org/officeDocument/2006/relationships">
+  <p:cSld>
+    <p:spTree>
+      <p:nvGrpSpPr>
+        <p:cNvPr id="1" name=""/>
+        <p:cNvGrpSpPr/>
+        <p:nvPr/>
+      </p:nvGrpSpPr>
+      <p:grpSpPr>
+        <a:xfrm>
+          <a:off x="0" y="0"/>
+          <a:ext cx="0" cy="0"/>
+          <a:chOff x="0" y="0"/>
+          <a:chExt cx="0" cy="0"/>
+        </a:xfrm>
+      </p:grpSpPr>
+      <p:sp>
+        <p:nvSpPr>
+          <p:cNvPr id="2" name="Slide Image Placeholder 1"/>
+          <p:cNvSpPr>
+            <a:spLocks noGrp="1"/>
+          </p:cNvSpPr>
+          <p:nvPr>
+            <p:ph type="sldImg" idx="2"/>
+          </p:nvPr>
+        </p:nvSpPr>
+        <p:spPr/>
+      </p:sp>
+      <p:sp>
+        <p:nvSpPr>
+          <p:cNvPr id="3" name="Notes Placeholder 2"/>
+          <p:cNvSpPr>
+            <a:spLocks noGrp="1"/>
+          </p:cNvSpPr>
+          <p:nvPr>
+            <p:ph type="body" idx="3" sz="quarter"/>
+          </p:nvPr>
+        </p:nvSpPr>
+        <p:spPr/>
+        <p:txBody>
+          <a:bodyPr/>
+          <a:lstStyle/>
+          <a:p>
+            <a:r>
+              <a:t>Give students a few minutes to answer on mini whiteboards or paper, then reveal the answers on the next slide.</a:t>
+            </a:r>
+          </a:p>
+        </p:txBody>
+      </p:sp>
+      <p:sp>
+        <p:nvSpPr>
+          <p:cNvPr id="4" name="Slide Number Placeholder 3"/>
+          <p:cNvSpPr>
+            <a:spLocks noGrp="1"/>
+          </p:cNvSpPr>
+          <p:nvPr>
+            <p:ph type="sldNum" idx="5" sz="quarter"/>
+          </p:nvPr>
+        </p:nvSpPr>
+        <p:spPr/>
+      </p:sp>
+    </p:spTree>
+  </p:cSld>
+  <p:clrMapOvr>
+    <a:masterClrMapping/>
+  </p:clrMapOvr>
+</p:notes>
+</file>
+
+<file path=ppt/notesSlides/notesSlide4.xml><?xml version="1.0" encoding="utf-8"?>
+<p:notes xmlns:a="http://schemas.openxmlformats.org/drawingml/2006/main" xmlns:p="http://schemas.openxmlformats.org/presentationml/2006/main" xmlns:r="http://schemas.openxmlformats.org/officeDocument/2006/relationships">
+  <p:cSld>
+    <p:spTree>
+      <p:nvGrpSpPr>
+        <p:cNvPr id="1" name=""/>
+        <p:cNvGrpSpPr/>
+        <p:nvPr/>
+      </p:nvGrpSpPr>
+      <p:grpSpPr>
+        <a:xfrm>
+          <a:off x="0" y="0"/>
+          <a:ext cx="0" cy="0"/>
+          <a:chOff x="0" y="0"/>
+          <a:chExt cx="0" cy="0"/>
+        </a:xfrm>
+      </p:grpSpPr>
+      <p:sp>
+        <p:nvSpPr>
+          <p:cNvPr id="2" name="Slide Image Placeholder 1"/>
+          <p:cNvSpPr>
+            <a:spLocks noGrp="1"/>
+          </p:cNvSpPr>
+          <p:nvPr>
+            <p:ph type="sldImg" idx="2"/>
+          </p:nvPr>
+        </p:nvSpPr>
+        <p:spPr/>
+      </p:sp>
+      <p:sp>
+        <p:nvSpPr>
+          <p:cNvPr id="3" name="Notes Placeholder 2"/>
+          <p:cNvSpPr>
+            <a:spLocks noGrp="1"/>
+          </p:cNvSpPr>
+          <p:nvPr>
+            <p:ph type="body" idx="3" sz="quarter"/>
+          </p:nvPr>
+        </p:nvSpPr>
+        <p:spPr/>
+        <p:txBody>
+          <a:bodyPr/>
+          <a:lstStyle/>
+          <a:p>
+            <a:r>
+              <a:t>Talk through any answers the class found difficult.</a:t>
+            </a:r>
+          </a:p>
+        </p:txBody>
+      </p:sp>
+      <p:sp>
+        <p:nvSpPr>
+          <p:cNvPr id="4" name="Slide Number Placeholder 3"/>
+          <p:cNvSpPr>
+            <a:spLocks noGrp="1"/>
+          </p:cNvSpPr>
+          <p:nvPr>
+            <p:ph type="sldNum" idx="5" sz="quarter"/>
+          </p:nvPr>
+        </p:nvSpPr>
+        <p:spPr/>
+      </p:sp>
+    </p:spTree>
+  </p:cSld>
+  <p:clrMapOvr>
+    <a:masterClrMapping/>
+  </p:clrMapOvr>
+</p:notes>
+</file>
+
+<file path=ppt/notesSlides/notesSlide5.xml><?xml version="1.0" encoding="utf-8"?>
 <p:notes xmlns:a="http://schemas.openxmlformats.org/drawingml/2006/main" xmlns:p="http://schemas.openxmlformats.org/presentationml/2006/main" xmlns:r="http://schemas.openxmlformats.org/officeDocument/2006/relationships">
   <p:cSld>
     <p:spTree>
@@ -3974,6 +4148,1756 @@
 </p:sld>
 </file>
 
+<file path=ppt/slides/slide10.xml><?xml version="1.0" encoding="utf-8"?>
+<p:sld xmlns:a="http://schemas.openxmlformats.org/drawingml/2006/main" xmlns:p="http://schemas.openxmlformats.org/presentationml/2006/main" xmlns:r="http://schemas.openxmlformats.org/officeDocument/2006/relationships">
+  <p:cSld>
+    <p:bg>
+      <p:bgPr>
+        <a:solidFill>
+          <a:srgbClr val="FFFFFF"/>
+        </a:solidFill>
+        <a:effectLst/>
+      </p:bgPr>
+    </p:bg>
+    <p:spTree>
+      <p:nvGrpSpPr>
+        <p:cNvPr id="1" name=""/>
+        <p:cNvGrpSpPr/>
+        <p:nvPr/>
+      </p:nvGrpSpPr>
+      <p:grpSpPr/>
+      <p:sp>
+        <p:nvSpPr>
+          <p:cNvPr id="2" name="TextBox 1"/>
+          <p:cNvSpPr txBox="1"/>
+          <p:nvPr/>
+        </p:nvSpPr>
+        <p:spPr>
+          <a:xfrm>
+            <a:off x="548640" y="320040"/>
+            <a:ext cx="11094415" cy="274320"/>
+          </a:xfrm>
+          <a:prstGeom prst="rect">
+            <a:avLst/>
+          </a:prstGeom>
+          <a:noFill/>
+        </p:spPr>
+        <p:txBody>
+          <a:bodyPr wrap="square" anchor="t" lIns="0" rIns="0" tIns="0" bIns="0"/>
+          <a:lstStyle/>
+          <a:p>
+            <a:pPr algn="l"/>
+            <a:r>
+              <a:rPr sz="1100" b="1" i="0">
+                <a:solidFill>
+                  <a:srgbClr val="54595D"/>
+                </a:solidFill>
+                <a:latin typeface="Calibri"/>
+              </a:rPr>
+              <a:t>MECHANICAL ENGINEERING  ·  Mechanical: Performance Outcome 6</a:t>
+            </a:r>
+          </a:p>
+        </p:txBody>
+      </p:sp>
+      <p:sp>
+        <p:nvSpPr>
+          <p:cNvPr id="3" name="TextBox 2"/>
+          <p:cNvSpPr txBox="1"/>
+          <p:nvPr/>
+        </p:nvSpPr>
+        <p:spPr>
+          <a:xfrm>
+            <a:off x="548640" y="566928"/>
+            <a:ext cx="11094415" cy="822960"/>
+          </a:xfrm>
+          <a:prstGeom prst="rect">
+            <a:avLst/>
+          </a:prstGeom>
+          <a:noFill/>
+        </p:spPr>
+        <p:txBody>
+          <a:bodyPr wrap="square" anchor="ctr" lIns="0" rIns="0" tIns="0" bIns="0"/>
+          <a:lstStyle/>
+          <a:p>
+            <a:pPr algn="l"/>
+            <a:r>
+              <a:rPr sz="3200" b="1" i="0">
+                <a:solidFill>
+                  <a:srgbClr val="03306E"/>
+                </a:solidFill>
+                <a:latin typeface="Cambria"/>
+              </a:rPr>
+              <a:t>Answers</a:t>
+            </a:r>
+          </a:p>
+        </p:txBody>
+      </p:sp>
+      <p:sp>
+        <p:nvSpPr>
+          <p:cNvPr id="4" name="TextBox 3"/>
+          <p:cNvSpPr txBox="1"/>
+          <p:nvPr/>
+        </p:nvSpPr>
+        <p:spPr>
+          <a:xfrm>
+            <a:off x="548640" y="6446520"/>
+            <a:ext cx="8229600" cy="274320"/>
+          </a:xfrm>
+          <a:prstGeom prst="rect">
+            <a:avLst/>
+          </a:prstGeom>
+          <a:noFill/>
+        </p:spPr>
+        <p:txBody>
+          <a:bodyPr wrap="square" anchor="t" lIns="0" rIns="0" tIns="0" bIns="0"/>
+          <a:lstStyle/>
+          <a:p>
+            <a:pPr algn="l"/>
+            <a:r>
+              <a:rPr sz="1000" b="0" i="0">
+                <a:solidFill>
+                  <a:srgbClr val="54595D"/>
+                </a:solidFill>
+                <a:latin typeface="Calibri"/>
+              </a:rPr>
+              <a:t>Design and Development for Engineering and Manufacturing T Level  ·  Technical Documentation and Communication</a:t>
+            </a:r>
+          </a:p>
+        </p:txBody>
+      </p:sp>
+      <p:sp>
+        <p:nvSpPr>
+          <p:cNvPr id="5" name="TextBox 4"/>
+          <p:cNvSpPr txBox="1"/>
+          <p:nvPr/>
+        </p:nvSpPr>
+        <p:spPr>
+          <a:xfrm>
+            <a:off x="10728655" y="6446520"/>
+            <a:ext cx="914400" cy="274320"/>
+          </a:xfrm>
+          <a:prstGeom prst="rect">
+            <a:avLst/>
+          </a:prstGeom>
+          <a:noFill/>
+        </p:spPr>
+        <p:txBody>
+          <a:bodyPr wrap="square" anchor="t" lIns="0" rIns="0" tIns="0" bIns="0"/>
+          <a:lstStyle/>
+          <a:p>
+            <a:pPr algn="r"/>
+            <a:r>
+              <a:rPr sz="1000" b="0" i="0">
+                <a:solidFill>
+                  <a:srgbClr val="54595D"/>
+                </a:solidFill>
+                <a:latin typeface="Calibri"/>
+              </a:rPr>
+              <a:t>10</a:t>
+            </a:r>
+          </a:p>
+        </p:txBody>
+      </p:sp>
+      <p:sp>
+        <p:nvSpPr>
+          <p:cNvPr id="6" name="Oval 5"/>
+          <p:cNvSpPr/>
+          <p:nvPr/>
+        </p:nvSpPr>
+        <p:spPr>
+          <a:xfrm>
+            <a:off x="548640" y="1618488"/>
+            <a:ext cx="411480" cy="411480"/>
+          </a:xfrm>
+          <a:prstGeom prst="ellipse">
+            <a:avLst/>
+          </a:prstGeom>
+          <a:solidFill>
+            <a:srgbClr val="E0463A"/>
+          </a:solidFill>
+          <a:ln>
+            <a:noFill/>
+          </a:ln>
+          <a:effectLst/>
+        </p:spPr>
+        <p:style>
+          <a:lnRef idx="1">
+            <a:schemeClr val="accent1"/>
+          </a:lnRef>
+          <a:fillRef idx="3">
+            <a:schemeClr val="accent1"/>
+          </a:fillRef>
+          <a:effectRef idx="2">
+            <a:schemeClr val="accent1"/>
+          </a:effectRef>
+          <a:fontRef idx="minor">
+            <a:schemeClr val="lt1"/>
+          </a:fontRef>
+        </p:style>
+        <p:txBody>
+          <a:bodyPr rtlCol="0" anchor="ctr" lIns="0" rIns="0" tIns="0" bIns="0"/>
+          <a:lstStyle/>
+          <a:p>
+            <a:pPr algn="ctr"/>
+            <a:r>
+              <a:rPr sz="1400" b="1">
+                <a:solidFill>
+                  <a:srgbClr val="FFFFFF"/>
+                </a:solidFill>
+                <a:latin typeface="Calibri"/>
+              </a:rPr>
+              <a:t>1</a:t>
+            </a:r>
+          </a:p>
+        </p:txBody>
+      </p:sp>
+      <p:sp>
+        <p:nvSpPr>
+          <p:cNvPr id="7" name="TextBox 6"/>
+          <p:cNvSpPr txBox="1"/>
+          <p:nvPr/>
+        </p:nvSpPr>
+        <p:spPr>
+          <a:xfrm>
+            <a:off x="1234440" y="1600200"/>
+            <a:ext cx="10408615" cy="1429512"/>
+          </a:xfrm>
+          <a:prstGeom prst="rect">
+            <a:avLst/>
+          </a:prstGeom>
+          <a:noFill/>
+        </p:spPr>
+        <p:txBody>
+          <a:bodyPr wrap="square" anchor="t" lIns="0" rIns="0" tIns="0" bIns="0"/>
+          <a:lstStyle/>
+          <a:p>
+            <a:pPr algn="l"/>
+            <a:r>
+              <a:rPr sz="1800" b="0" i="0">
+                <a:solidFill>
+                  <a:srgbClr val="54595D"/>
+                </a:solidFill>
+                <a:latin typeface="Calibri"/>
+              </a:rPr>
+              <a:t>Why use revision letters on drawings?</a:t>
+            </a:r>
+          </a:p>
+          <a:p>
+            <a:r>
+              <a:rPr sz="1800" b="1">
+                <a:solidFill>
+                  <a:srgbClr val="03306E"/>
+                </a:solidFill>
+                <a:latin typeface="Calibri"/>
+              </a:rPr>
+              <a:t>To show which version is current and track changes.</a:t>
+            </a:r>
+          </a:p>
+        </p:txBody>
+      </p:sp>
+      <p:sp>
+        <p:nvSpPr>
+          <p:cNvPr id="8" name="Oval 7"/>
+          <p:cNvSpPr/>
+          <p:nvPr/>
+        </p:nvSpPr>
+        <p:spPr>
+          <a:xfrm>
+            <a:off x="548640" y="3212592"/>
+            <a:ext cx="411480" cy="411480"/>
+          </a:xfrm>
+          <a:prstGeom prst="ellipse">
+            <a:avLst/>
+          </a:prstGeom>
+          <a:solidFill>
+            <a:srgbClr val="E0463A"/>
+          </a:solidFill>
+          <a:ln>
+            <a:noFill/>
+          </a:ln>
+          <a:effectLst/>
+        </p:spPr>
+        <p:style>
+          <a:lnRef idx="1">
+            <a:schemeClr val="accent1"/>
+          </a:lnRef>
+          <a:fillRef idx="3">
+            <a:schemeClr val="accent1"/>
+          </a:fillRef>
+          <a:effectRef idx="2">
+            <a:schemeClr val="accent1"/>
+          </a:effectRef>
+          <a:fontRef idx="minor">
+            <a:schemeClr val="lt1"/>
+          </a:fontRef>
+        </p:style>
+        <p:txBody>
+          <a:bodyPr rtlCol="0" anchor="ctr" lIns="0" rIns="0" tIns="0" bIns="0"/>
+          <a:lstStyle/>
+          <a:p>
+            <a:pPr algn="ctr"/>
+            <a:r>
+              <a:rPr sz="1400" b="1">
+                <a:solidFill>
+                  <a:srgbClr val="FFFFFF"/>
+                </a:solidFill>
+                <a:latin typeface="Calibri"/>
+              </a:rPr>
+              <a:t>2</a:t>
+            </a:r>
+          </a:p>
+        </p:txBody>
+      </p:sp>
+      <p:sp>
+        <p:nvSpPr>
+          <p:cNvPr id="9" name="TextBox 8"/>
+          <p:cNvSpPr txBox="1"/>
+          <p:nvPr/>
+        </p:nvSpPr>
+        <p:spPr>
+          <a:xfrm>
+            <a:off x="1234440" y="3194304"/>
+            <a:ext cx="10408615" cy="1429512"/>
+          </a:xfrm>
+          <a:prstGeom prst="rect">
+            <a:avLst/>
+          </a:prstGeom>
+          <a:noFill/>
+        </p:spPr>
+        <p:txBody>
+          <a:bodyPr wrap="square" anchor="t" lIns="0" rIns="0" tIns="0" bIns="0"/>
+          <a:lstStyle/>
+          <a:p>
+            <a:pPr algn="l"/>
+            <a:r>
+              <a:rPr sz="1800" b="0" i="0">
+                <a:solidFill>
+                  <a:srgbClr val="54595D"/>
+                </a:solidFill>
+                <a:latin typeface="Calibri"/>
+              </a:rPr>
+              <a:t>Name two digital tools for managing documentation.</a:t>
+            </a:r>
+          </a:p>
+          <a:p>
+            <a:r>
+              <a:rPr sz="1800" b="1">
+                <a:solidFill>
+                  <a:srgbClr val="03306E"/>
+                </a:solidFill>
+                <a:latin typeface="Calibri"/>
+              </a:rPr>
+              <a:t>Any two of: CAD, document management systems, SharePoint, spreadsheets.</a:t>
+            </a:r>
+          </a:p>
+        </p:txBody>
+      </p:sp>
+      <p:sp>
+        <p:nvSpPr>
+          <p:cNvPr id="10" name="Oval 9"/>
+          <p:cNvSpPr/>
+          <p:nvPr/>
+        </p:nvSpPr>
+        <p:spPr>
+          <a:xfrm>
+            <a:off x="548640" y="4806695"/>
+            <a:ext cx="411480" cy="411480"/>
+          </a:xfrm>
+          <a:prstGeom prst="ellipse">
+            <a:avLst/>
+          </a:prstGeom>
+          <a:solidFill>
+            <a:srgbClr val="E0463A"/>
+          </a:solidFill>
+          <a:ln>
+            <a:noFill/>
+          </a:ln>
+          <a:effectLst/>
+        </p:spPr>
+        <p:style>
+          <a:lnRef idx="1">
+            <a:schemeClr val="accent1"/>
+          </a:lnRef>
+          <a:fillRef idx="3">
+            <a:schemeClr val="accent1"/>
+          </a:fillRef>
+          <a:effectRef idx="2">
+            <a:schemeClr val="accent1"/>
+          </a:effectRef>
+          <a:fontRef idx="minor">
+            <a:schemeClr val="lt1"/>
+          </a:fontRef>
+        </p:style>
+        <p:txBody>
+          <a:bodyPr rtlCol="0" anchor="ctr" lIns="0" rIns="0" tIns="0" bIns="0"/>
+          <a:lstStyle/>
+          <a:p>
+            <a:pPr algn="ctr"/>
+            <a:r>
+              <a:rPr sz="1400" b="1">
+                <a:solidFill>
+                  <a:srgbClr val="FFFFFF"/>
+                </a:solidFill>
+                <a:latin typeface="Calibri"/>
+              </a:rPr>
+              <a:t>3</a:t>
+            </a:r>
+          </a:p>
+        </p:txBody>
+      </p:sp>
+      <p:sp>
+        <p:nvSpPr>
+          <p:cNvPr id="11" name="TextBox 10"/>
+          <p:cNvSpPr txBox="1"/>
+          <p:nvPr/>
+        </p:nvSpPr>
+        <p:spPr>
+          <a:xfrm>
+            <a:off x="1234440" y="4788408"/>
+            <a:ext cx="10408615" cy="1429512"/>
+          </a:xfrm>
+          <a:prstGeom prst="rect">
+            <a:avLst/>
+          </a:prstGeom>
+          <a:noFill/>
+        </p:spPr>
+        <p:txBody>
+          <a:bodyPr wrap="square" anchor="t" lIns="0" rIns="0" tIns="0" bIns="0"/>
+          <a:lstStyle/>
+          <a:p>
+            <a:pPr algn="l"/>
+            <a:r>
+              <a:rPr sz="1800" b="0" i="0">
+                <a:solidFill>
+                  <a:srgbClr val="54595D"/>
+                </a:solidFill>
+                <a:latin typeface="Calibri"/>
+              </a:rPr>
+              <a:t>Which format suits a non-technical client?</a:t>
+            </a:r>
+          </a:p>
+          <a:p>
+            <a:r>
+              <a:rPr sz="1800" b="1">
+                <a:solidFill>
+                  <a:srgbClr val="03306E"/>
+                </a:solidFill>
+                <a:latin typeface="Calibri"/>
+              </a:rPr>
+              <a:t>E.g. a rendered model, sketch or plain-language report.</a:t>
+            </a:r>
+          </a:p>
+        </p:txBody>
+      </p:sp>
+    </p:spTree>
+  </p:cSld>
+  <p:clrMapOvr>
+    <a:masterClrMapping/>
+  </p:clrMapOvr>
+</p:sld>
+</file>
+
+<file path=ppt/slides/slide11.xml><?xml version="1.0" encoding="utf-8"?>
+<p:sld xmlns:a="http://schemas.openxmlformats.org/drawingml/2006/main" xmlns:p="http://schemas.openxmlformats.org/presentationml/2006/main" xmlns:r="http://schemas.openxmlformats.org/officeDocument/2006/relationships">
+  <p:cSld>
+    <p:bg>
+      <p:bgPr>
+        <a:solidFill>
+          <a:srgbClr val="FFFFFF"/>
+        </a:solidFill>
+        <a:effectLst/>
+      </p:bgPr>
+    </p:bg>
+    <p:spTree>
+      <p:nvGrpSpPr>
+        <p:cNvPr id="1" name=""/>
+        <p:cNvGrpSpPr/>
+        <p:nvPr/>
+      </p:nvGrpSpPr>
+      <p:grpSpPr/>
+      <p:sp>
+        <p:nvSpPr>
+          <p:cNvPr id="2" name="TextBox 1"/>
+          <p:cNvSpPr txBox="1"/>
+          <p:nvPr/>
+        </p:nvSpPr>
+        <p:spPr>
+          <a:xfrm>
+            <a:off x="548640" y="320040"/>
+            <a:ext cx="11094415" cy="274320"/>
+          </a:xfrm>
+          <a:prstGeom prst="rect">
+            <a:avLst/>
+          </a:prstGeom>
+          <a:noFill/>
+        </p:spPr>
+        <p:txBody>
+          <a:bodyPr wrap="square" anchor="t" lIns="0" rIns="0" tIns="0" bIns="0"/>
+          <a:lstStyle/>
+          <a:p>
+            <a:pPr algn="l"/>
+            <a:r>
+              <a:rPr sz="1100" b="1" i="0">
+                <a:solidFill>
+                  <a:srgbClr val="54595D"/>
+                </a:solidFill>
+                <a:latin typeface="Calibri"/>
+              </a:rPr>
+              <a:t>MECHANICAL ENGINEERING  ·  Mechanical: Performance Outcome 6</a:t>
+            </a:r>
+          </a:p>
+        </p:txBody>
+      </p:sp>
+      <p:sp>
+        <p:nvSpPr>
+          <p:cNvPr id="3" name="TextBox 2"/>
+          <p:cNvSpPr txBox="1"/>
+          <p:nvPr/>
+        </p:nvSpPr>
+        <p:spPr>
+          <a:xfrm>
+            <a:off x="548640" y="566928"/>
+            <a:ext cx="11094415" cy="822960"/>
+          </a:xfrm>
+          <a:prstGeom prst="rect">
+            <a:avLst/>
+          </a:prstGeom>
+          <a:noFill/>
+        </p:spPr>
+        <p:txBody>
+          <a:bodyPr wrap="square" anchor="ctr" lIns="0" rIns="0" tIns="0" bIns="0"/>
+          <a:lstStyle/>
+          <a:p>
+            <a:pPr algn="l"/>
+            <a:r>
+              <a:rPr sz="3200" b="1" i="0">
+                <a:solidFill>
+                  <a:srgbClr val="03306E"/>
+                </a:solidFill>
+                <a:latin typeface="Cambria"/>
+              </a:rPr>
+              <a:t>Activity: Document pack</a:t>
+            </a:r>
+          </a:p>
+        </p:txBody>
+      </p:sp>
+      <p:sp>
+        <p:nvSpPr>
+          <p:cNvPr id="4" name="TextBox 3"/>
+          <p:cNvSpPr txBox="1"/>
+          <p:nvPr/>
+        </p:nvSpPr>
+        <p:spPr>
+          <a:xfrm>
+            <a:off x="548640" y="6446520"/>
+            <a:ext cx="8229600" cy="274320"/>
+          </a:xfrm>
+          <a:prstGeom prst="rect">
+            <a:avLst/>
+          </a:prstGeom>
+          <a:noFill/>
+        </p:spPr>
+        <p:txBody>
+          <a:bodyPr wrap="square" anchor="t" lIns="0" rIns="0" tIns="0" bIns="0"/>
+          <a:lstStyle/>
+          <a:p>
+            <a:pPr algn="l"/>
+            <a:r>
+              <a:rPr sz="1000" b="0" i="0">
+                <a:solidFill>
+                  <a:srgbClr val="54595D"/>
+                </a:solidFill>
+                <a:latin typeface="Calibri"/>
+              </a:rPr>
+              <a:t>Design and Development for Engineering and Manufacturing T Level  ·  Technical Documentation and Communication</a:t>
+            </a:r>
+          </a:p>
+        </p:txBody>
+      </p:sp>
+      <p:sp>
+        <p:nvSpPr>
+          <p:cNvPr id="5" name="TextBox 4"/>
+          <p:cNvSpPr txBox="1"/>
+          <p:nvPr/>
+        </p:nvSpPr>
+        <p:spPr>
+          <a:xfrm>
+            <a:off x="10728655" y="6446520"/>
+            <a:ext cx="914400" cy="274320"/>
+          </a:xfrm>
+          <a:prstGeom prst="rect">
+            <a:avLst/>
+          </a:prstGeom>
+          <a:noFill/>
+        </p:spPr>
+        <p:txBody>
+          <a:bodyPr wrap="square" anchor="t" lIns="0" rIns="0" tIns="0" bIns="0"/>
+          <a:lstStyle/>
+          <a:p>
+            <a:pPr algn="r"/>
+            <a:r>
+              <a:rPr sz="1000" b="0" i="0">
+                <a:solidFill>
+                  <a:srgbClr val="54595D"/>
+                </a:solidFill>
+                <a:latin typeface="Calibri"/>
+              </a:rPr>
+              <a:t>11</a:t>
+            </a:r>
+          </a:p>
+        </p:txBody>
+      </p:sp>
+      <p:sp>
+        <p:nvSpPr>
+          <p:cNvPr id="6" name="Rounded Rectangle 5"/>
+          <p:cNvSpPr/>
+          <p:nvPr/>
+        </p:nvSpPr>
+        <p:spPr>
+          <a:xfrm>
+            <a:off x="548640" y="1508760"/>
+            <a:ext cx="2011680" cy="457200"/>
+          </a:xfrm>
+          <a:prstGeom prst="roundRect">
+            <a:avLst>
+              <a:gd name="adj" fmla="val 50000"/>
+            </a:avLst>
+          </a:prstGeom>
+          <a:solidFill>
+            <a:srgbClr val="E0463A"/>
+          </a:solidFill>
+          <a:ln>
+            <a:noFill/>
+          </a:ln>
+          <a:effectLst/>
+        </p:spPr>
+        <p:style>
+          <a:lnRef idx="1">
+            <a:schemeClr val="accent1"/>
+          </a:lnRef>
+          <a:fillRef idx="3">
+            <a:schemeClr val="accent1"/>
+          </a:fillRef>
+          <a:effectRef idx="2">
+            <a:schemeClr val="accent1"/>
+          </a:effectRef>
+          <a:fontRef idx="minor">
+            <a:schemeClr val="lt1"/>
+          </a:fontRef>
+        </p:style>
+        <p:txBody>
+          <a:bodyPr rtlCol="0" anchor="ctr"/>
+          <a:lstStyle/>
+          <a:p/>
+        </p:txBody>
+      </p:sp>
+      <p:sp>
+        <p:nvSpPr>
+          <p:cNvPr id="7" name="TextBox 6"/>
+          <p:cNvSpPr txBox="1"/>
+          <p:nvPr/>
+        </p:nvSpPr>
+        <p:spPr>
+          <a:xfrm>
+            <a:off x="548640" y="1508760"/>
+            <a:ext cx="2011680" cy="457200"/>
+          </a:xfrm>
+          <a:prstGeom prst="rect">
+            <a:avLst/>
+          </a:prstGeom>
+          <a:noFill/>
+        </p:spPr>
+        <p:txBody>
+          <a:bodyPr wrap="square" anchor="ctr" lIns="0" rIns="0" tIns="0" bIns="0"/>
+          <a:lstStyle/>
+          <a:p>
+            <a:pPr algn="ctr"/>
+            <a:r>
+              <a:rPr sz="1400" b="1" i="0">
+                <a:solidFill>
+                  <a:srgbClr val="FFFFFF"/>
+                </a:solidFill>
+                <a:latin typeface="Calibri"/>
+              </a:rPr>
+              <a:t>30 minutes</a:t>
+            </a:r>
+          </a:p>
+        </p:txBody>
+      </p:sp>
+      <p:sp>
+        <p:nvSpPr>
+          <p:cNvPr id="8" name="TextBox 7"/>
+          <p:cNvSpPr txBox="1"/>
+          <p:nvPr/>
+        </p:nvSpPr>
+        <p:spPr>
+          <a:xfrm>
+            <a:off x="2743200" y="1508760"/>
+            <a:ext cx="4754880" cy="457200"/>
+          </a:xfrm>
+          <a:prstGeom prst="rect">
+            <a:avLst/>
+          </a:prstGeom>
+          <a:noFill/>
+        </p:spPr>
+        <p:txBody>
+          <a:bodyPr wrap="square" anchor="ctr" lIns="0" rIns="0" tIns="0" bIns="0"/>
+          <a:lstStyle/>
+          <a:p>
+            <a:pPr algn="l"/>
+            <a:r>
+              <a:rPr sz="1400" b="0" i="1">
+                <a:solidFill>
+                  <a:srgbClr val="54595D"/>
+                </a:solidFill>
+                <a:latin typeface="Calibri"/>
+              </a:rPr>
+              <a:t>Pairs</a:t>
+            </a:r>
+          </a:p>
+        </p:txBody>
+      </p:sp>
+      <p:sp>
+        <p:nvSpPr>
+          <p:cNvPr id="9" name="Oval 8"/>
+          <p:cNvSpPr/>
+          <p:nvPr/>
+        </p:nvSpPr>
+        <p:spPr>
+          <a:xfrm>
+            <a:off x="548640" y="2482596"/>
+            <a:ext cx="384048" cy="384048"/>
+          </a:xfrm>
+          <a:prstGeom prst="ellipse">
+            <a:avLst/>
+          </a:prstGeom>
+          <a:solidFill>
+            <a:srgbClr val="0645AD"/>
+          </a:solidFill>
+          <a:ln>
+            <a:noFill/>
+          </a:ln>
+          <a:effectLst/>
+        </p:spPr>
+        <p:style>
+          <a:lnRef idx="1">
+            <a:schemeClr val="accent1"/>
+          </a:lnRef>
+          <a:fillRef idx="3">
+            <a:schemeClr val="accent1"/>
+          </a:fillRef>
+          <a:effectRef idx="2">
+            <a:schemeClr val="accent1"/>
+          </a:effectRef>
+          <a:fontRef idx="minor">
+            <a:schemeClr val="lt1"/>
+          </a:fontRef>
+        </p:style>
+        <p:txBody>
+          <a:bodyPr rtlCol="0" anchor="ctr" lIns="0" rIns="0" tIns="0" bIns="0"/>
+          <a:lstStyle/>
+          <a:p>
+            <a:pPr algn="ctr"/>
+            <a:r>
+              <a:rPr sz="1300" b="1">
+                <a:solidFill>
+                  <a:srgbClr val="FFFFFF"/>
+                </a:solidFill>
+                <a:latin typeface="Calibri"/>
+              </a:rPr>
+              <a:t>1</a:t>
+            </a:r>
+          </a:p>
+        </p:txBody>
+      </p:sp>
+      <p:sp>
+        <p:nvSpPr>
+          <p:cNvPr id="10" name="TextBox 9"/>
+          <p:cNvSpPr txBox="1"/>
+          <p:nvPr/>
+        </p:nvSpPr>
+        <p:spPr>
+          <a:xfrm>
+            <a:off x="1143000" y="2240280"/>
+            <a:ext cx="5943600" cy="868680"/>
+          </a:xfrm>
+          <a:prstGeom prst="rect">
+            <a:avLst/>
+          </a:prstGeom>
+          <a:noFill/>
+        </p:spPr>
+        <p:txBody>
+          <a:bodyPr wrap="square" anchor="ctr" lIns="0" rIns="0" tIns="0" bIns="0"/>
+          <a:lstStyle/>
+          <a:p>
+            <a:pPr algn="l"/>
+            <a:r>
+              <a:rPr sz="1700" b="0" i="0">
+                <a:solidFill>
+                  <a:srgbClr val="202122"/>
+                </a:solidFill>
+                <a:latin typeface="Calibri"/>
+              </a:rPr>
+              <a:t>Take a design you have worked on.</a:t>
+            </a:r>
+          </a:p>
+        </p:txBody>
+      </p:sp>
+      <p:sp>
+        <p:nvSpPr>
+          <p:cNvPr id="11" name="Oval 10"/>
+          <p:cNvSpPr/>
+          <p:nvPr/>
+        </p:nvSpPr>
+        <p:spPr>
+          <a:xfrm>
+            <a:off x="548640" y="3461004"/>
+            <a:ext cx="384048" cy="384048"/>
+          </a:xfrm>
+          <a:prstGeom prst="ellipse">
+            <a:avLst/>
+          </a:prstGeom>
+          <a:solidFill>
+            <a:srgbClr val="0645AD"/>
+          </a:solidFill>
+          <a:ln>
+            <a:noFill/>
+          </a:ln>
+          <a:effectLst/>
+        </p:spPr>
+        <p:style>
+          <a:lnRef idx="1">
+            <a:schemeClr val="accent1"/>
+          </a:lnRef>
+          <a:fillRef idx="3">
+            <a:schemeClr val="accent1"/>
+          </a:fillRef>
+          <a:effectRef idx="2">
+            <a:schemeClr val="accent1"/>
+          </a:effectRef>
+          <a:fontRef idx="minor">
+            <a:schemeClr val="lt1"/>
+          </a:fontRef>
+        </p:style>
+        <p:txBody>
+          <a:bodyPr rtlCol="0" anchor="ctr" lIns="0" rIns="0" tIns="0" bIns="0"/>
+          <a:lstStyle/>
+          <a:p>
+            <a:pPr algn="ctr"/>
+            <a:r>
+              <a:rPr sz="1300" b="1">
+                <a:solidFill>
+                  <a:srgbClr val="FFFFFF"/>
+                </a:solidFill>
+                <a:latin typeface="Calibri"/>
+              </a:rPr>
+              <a:t>2</a:t>
+            </a:r>
+          </a:p>
+        </p:txBody>
+      </p:sp>
+      <p:sp>
+        <p:nvSpPr>
+          <p:cNvPr id="12" name="TextBox 11"/>
+          <p:cNvSpPr txBox="1"/>
+          <p:nvPr/>
+        </p:nvSpPr>
+        <p:spPr>
+          <a:xfrm>
+            <a:off x="1143000" y="3218688"/>
+            <a:ext cx="5943600" cy="868680"/>
+          </a:xfrm>
+          <a:prstGeom prst="rect">
+            <a:avLst/>
+          </a:prstGeom>
+          <a:noFill/>
+        </p:spPr>
+        <p:txBody>
+          <a:bodyPr wrap="square" anchor="ctr" lIns="0" rIns="0" tIns="0" bIns="0"/>
+          <a:lstStyle/>
+          <a:p>
+            <a:pPr algn="l"/>
+            <a:r>
+              <a:rPr sz="1700" b="0" i="0">
+                <a:solidFill>
+                  <a:srgbClr val="202122"/>
+                </a:solidFill>
+                <a:latin typeface="Calibri"/>
+              </a:rPr>
+              <a:t>Produce a revision-controlled drawing with full annotations.</a:t>
+            </a:r>
+          </a:p>
+        </p:txBody>
+      </p:sp>
+      <p:sp>
+        <p:nvSpPr>
+          <p:cNvPr id="13" name="Oval 12"/>
+          <p:cNvSpPr/>
+          <p:nvPr/>
+        </p:nvSpPr>
+        <p:spPr>
+          <a:xfrm>
+            <a:off x="548640" y="4439412"/>
+            <a:ext cx="384048" cy="384048"/>
+          </a:xfrm>
+          <a:prstGeom prst="ellipse">
+            <a:avLst/>
+          </a:prstGeom>
+          <a:solidFill>
+            <a:srgbClr val="0645AD"/>
+          </a:solidFill>
+          <a:ln>
+            <a:noFill/>
+          </a:ln>
+          <a:effectLst/>
+        </p:spPr>
+        <p:style>
+          <a:lnRef idx="1">
+            <a:schemeClr val="accent1"/>
+          </a:lnRef>
+          <a:fillRef idx="3">
+            <a:schemeClr val="accent1"/>
+          </a:fillRef>
+          <a:effectRef idx="2">
+            <a:schemeClr val="accent1"/>
+          </a:effectRef>
+          <a:fontRef idx="minor">
+            <a:schemeClr val="lt1"/>
+          </a:fontRef>
+        </p:style>
+        <p:txBody>
+          <a:bodyPr rtlCol="0" anchor="ctr" lIns="0" rIns="0" tIns="0" bIns="0"/>
+          <a:lstStyle/>
+          <a:p>
+            <a:pPr algn="ctr"/>
+            <a:r>
+              <a:rPr sz="1300" b="1">
+                <a:solidFill>
+                  <a:srgbClr val="FFFFFF"/>
+                </a:solidFill>
+                <a:latin typeface="Calibri"/>
+              </a:rPr>
+              <a:t>3</a:t>
+            </a:r>
+          </a:p>
+        </p:txBody>
+      </p:sp>
+      <p:sp>
+        <p:nvSpPr>
+          <p:cNvPr id="14" name="TextBox 13"/>
+          <p:cNvSpPr txBox="1"/>
+          <p:nvPr/>
+        </p:nvSpPr>
+        <p:spPr>
+          <a:xfrm>
+            <a:off x="1143000" y="4197096"/>
+            <a:ext cx="5943600" cy="868680"/>
+          </a:xfrm>
+          <a:prstGeom prst="rect">
+            <a:avLst/>
+          </a:prstGeom>
+          <a:noFill/>
+        </p:spPr>
+        <p:txBody>
+          <a:bodyPr wrap="square" anchor="ctr" lIns="0" rIns="0" tIns="0" bIns="0"/>
+          <a:lstStyle/>
+          <a:p>
+            <a:pPr algn="l"/>
+            <a:r>
+              <a:rPr sz="1700" b="0" i="0">
+                <a:solidFill>
+                  <a:srgbClr val="202122"/>
+                </a:solidFill>
+                <a:latin typeface="Calibri"/>
+              </a:rPr>
+              <a:t>Write a one-page summary for the client.</a:t>
+            </a:r>
+          </a:p>
+        </p:txBody>
+      </p:sp>
+      <p:sp>
+        <p:nvSpPr>
+          <p:cNvPr id="15" name="Oval 14"/>
+          <p:cNvSpPr/>
+          <p:nvPr/>
+        </p:nvSpPr>
+        <p:spPr>
+          <a:xfrm>
+            <a:off x="548640" y="5417820"/>
+            <a:ext cx="384048" cy="384048"/>
+          </a:xfrm>
+          <a:prstGeom prst="ellipse">
+            <a:avLst/>
+          </a:prstGeom>
+          <a:solidFill>
+            <a:srgbClr val="0645AD"/>
+          </a:solidFill>
+          <a:ln>
+            <a:noFill/>
+          </a:ln>
+          <a:effectLst/>
+        </p:spPr>
+        <p:style>
+          <a:lnRef idx="1">
+            <a:schemeClr val="accent1"/>
+          </a:lnRef>
+          <a:fillRef idx="3">
+            <a:schemeClr val="accent1"/>
+          </a:fillRef>
+          <a:effectRef idx="2">
+            <a:schemeClr val="accent1"/>
+          </a:effectRef>
+          <a:fontRef idx="minor">
+            <a:schemeClr val="lt1"/>
+          </a:fontRef>
+        </p:style>
+        <p:txBody>
+          <a:bodyPr rtlCol="0" anchor="ctr" lIns="0" rIns="0" tIns="0" bIns="0"/>
+          <a:lstStyle/>
+          <a:p>
+            <a:pPr algn="ctr"/>
+            <a:r>
+              <a:rPr sz="1300" b="1">
+                <a:solidFill>
+                  <a:srgbClr val="FFFFFF"/>
+                </a:solidFill>
+                <a:latin typeface="Calibri"/>
+              </a:rPr>
+              <a:t>4</a:t>
+            </a:r>
+          </a:p>
+        </p:txBody>
+      </p:sp>
+      <p:sp>
+        <p:nvSpPr>
+          <p:cNvPr id="16" name="TextBox 15"/>
+          <p:cNvSpPr txBox="1"/>
+          <p:nvPr/>
+        </p:nvSpPr>
+        <p:spPr>
+          <a:xfrm>
+            <a:off x="1143000" y="5175504"/>
+            <a:ext cx="5943600" cy="868680"/>
+          </a:xfrm>
+          <a:prstGeom prst="rect">
+            <a:avLst/>
+          </a:prstGeom>
+          <a:noFill/>
+        </p:spPr>
+        <p:txBody>
+          <a:bodyPr wrap="square" anchor="ctr" lIns="0" rIns="0" tIns="0" bIns="0"/>
+          <a:lstStyle/>
+          <a:p>
+            <a:pPr algn="l"/>
+            <a:r>
+              <a:rPr sz="1700" b="0" i="0">
+                <a:solidFill>
+                  <a:srgbClr val="202122"/>
+                </a:solidFill>
+                <a:latin typeface="Calibri"/>
+              </a:rPr>
+              <a:t>Log one design change with a change note.</a:t>
+            </a:r>
+          </a:p>
+        </p:txBody>
+      </p:sp>
+      <p:sp>
+        <p:nvSpPr>
+          <p:cNvPr id="17" name="Rounded Rectangle 16"/>
+          <p:cNvSpPr/>
+          <p:nvPr/>
+        </p:nvSpPr>
+        <p:spPr>
+          <a:xfrm>
+            <a:off x="7772400" y="1508760"/>
+            <a:ext cx="3867912" cy="4572000"/>
+          </a:xfrm>
+          <a:prstGeom prst="roundRect">
+            <a:avLst>
+              <a:gd name="adj" fmla="val 8000"/>
+            </a:avLst>
+          </a:prstGeom>
+          <a:solidFill>
+            <a:srgbClr val="EAF3FF"/>
+          </a:solidFill>
+          <a:ln>
+            <a:noFill/>
+          </a:ln>
+          <a:effectLst/>
+        </p:spPr>
+        <p:style>
+          <a:lnRef idx="1">
+            <a:schemeClr val="accent1"/>
+          </a:lnRef>
+          <a:fillRef idx="3">
+            <a:schemeClr val="accent1"/>
+          </a:fillRef>
+          <a:effectRef idx="2">
+            <a:schemeClr val="accent1"/>
+          </a:effectRef>
+          <a:fontRef idx="minor">
+            <a:schemeClr val="lt1"/>
+          </a:fontRef>
+        </p:style>
+        <p:txBody>
+          <a:bodyPr rtlCol="0" anchor="ctr"/>
+          <a:lstStyle/>
+          <a:p/>
+        </p:txBody>
+      </p:sp>
+      <p:sp>
+        <p:nvSpPr>
+          <p:cNvPr id="18" name="TextBox 17"/>
+          <p:cNvSpPr txBox="1"/>
+          <p:nvPr/>
+        </p:nvSpPr>
+        <p:spPr>
+          <a:xfrm>
+            <a:off x="8046720" y="1737360"/>
+            <a:ext cx="3291840" cy="365760"/>
+          </a:xfrm>
+          <a:prstGeom prst="rect">
+            <a:avLst/>
+          </a:prstGeom>
+          <a:noFill/>
+        </p:spPr>
+        <p:txBody>
+          <a:bodyPr wrap="square" anchor="t" lIns="0" rIns="0" tIns="0" bIns="0"/>
+          <a:lstStyle/>
+          <a:p>
+            <a:pPr algn="l"/>
+            <a:r>
+              <a:rPr sz="1300" b="1" i="0">
+                <a:solidFill>
+                  <a:srgbClr val="0645AD"/>
+                </a:solidFill>
+                <a:latin typeface="Calibri"/>
+              </a:rPr>
+              <a:t>SUCCESS CRITERIA</a:t>
+            </a:r>
+          </a:p>
+        </p:txBody>
+      </p:sp>
+      <p:sp>
+        <p:nvSpPr>
+          <p:cNvPr id="19" name="TextBox 18"/>
+          <p:cNvSpPr txBox="1"/>
+          <p:nvPr/>
+        </p:nvSpPr>
+        <p:spPr>
+          <a:xfrm>
+            <a:off x="8046720" y="2240280"/>
+            <a:ext cx="3337560" cy="3657600"/>
+          </a:xfrm>
+          <a:prstGeom prst="rect">
+            <a:avLst/>
+          </a:prstGeom>
+          <a:noFill/>
+        </p:spPr>
+        <p:txBody>
+          <a:bodyPr wrap="square" lIns="0" rIns="0" tIns="0" bIns="0">
+            <a:spAutoFit/>
+          </a:bodyPr>
+          <a:lstStyle/>
+          <a:p>
+            <a:pPr marL="274320" indent="-274320">
+              <a:spcAft>
+                <a:spcPts val="810"/>
+              </a:spcAft>
+              <a:buClr>
+                <a:srgbClr val="0645AD"/>
+              </a:buClr>
+              <a:buFont typeface="Arial"/>
+              <a:buChar char="•"/>
+            </a:pPr>
+            <a:r>
+              <a:rPr sz="1800" b="0">
+                <a:solidFill>
+                  <a:srgbClr val="202122"/>
+                </a:solidFill>
+                <a:latin typeface="Calibri"/>
+              </a:rPr>
+              <a:t>Annotations correct</a:t>
+            </a:r>
+          </a:p>
+          <a:p>
+            <a:pPr marL="274320" indent="-274320">
+              <a:spcAft>
+                <a:spcPts val="810"/>
+              </a:spcAft>
+              <a:buClr>
+                <a:srgbClr val="0645AD"/>
+              </a:buClr>
+              <a:buFont typeface="Arial"/>
+              <a:buChar char="•"/>
+            </a:pPr>
+            <a:r>
+              <a:rPr sz="1800" b="0">
+                <a:solidFill>
+                  <a:srgbClr val="202122"/>
+                </a:solidFill>
+                <a:latin typeface="Calibri"/>
+              </a:rPr>
+              <a:t>Revision control used</a:t>
+            </a:r>
+          </a:p>
+          <a:p>
+            <a:pPr marL="274320" indent="-274320">
+              <a:spcAft>
+                <a:spcPts val="810"/>
+              </a:spcAft>
+              <a:buClr>
+                <a:srgbClr val="0645AD"/>
+              </a:buClr>
+              <a:buFont typeface="Arial"/>
+              <a:buChar char="•"/>
+            </a:pPr>
+            <a:r>
+              <a:rPr sz="1800" b="0">
+                <a:solidFill>
+                  <a:srgbClr val="202122"/>
+                </a:solidFill>
+                <a:latin typeface="Calibri"/>
+              </a:rPr>
+              <a:t>Summary suits a non-technical reader</a:t>
+            </a:r>
+          </a:p>
+        </p:txBody>
+      </p:sp>
+    </p:spTree>
+  </p:cSld>
+  <p:clrMapOvr>
+    <a:masterClrMapping/>
+  </p:clrMapOvr>
+</p:sld>
+</file>
+
+<file path=ppt/slides/slide12.xml><?xml version="1.0" encoding="utf-8"?>
+<p:sld xmlns:a="http://schemas.openxmlformats.org/drawingml/2006/main" xmlns:p="http://schemas.openxmlformats.org/presentationml/2006/main" xmlns:r="http://schemas.openxmlformats.org/officeDocument/2006/relationships">
+  <p:cSld>
+    <p:bg>
+      <p:bgPr>
+        <a:solidFill>
+          <a:srgbClr val="03306E"/>
+        </a:solidFill>
+        <a:effectLst/>
+      </p:bgPr>
+    </p:bg>
+    <p:spTree>
+      <p:nvGrpSpPr>
+        <p:cNvPr id="1" name=""/>
+        <p:cNvGrpSpPr/>
+        <p:nvPr/>
+      </p:nvGrpSpPr>
+      <p:grpSpPr/>
+      <p:sp>
+        <p:nvSpPr>
+          <p:cNvPr id="2" name="TextBox 1"/>
+          <p:cNvSpPr txBox="1"/>
+          <p:nvPr/>
+        </p:nvSpPr>
+        <p:spPr>
+          <a:xfrm>
+            <a:off x="548640" y="320040"/>
+            <a:ext cx="11094415" cy="274320"/>
+          </a:xfrm>
+          <a:prstGeom prst="rect">
+            <a:avLst/>
+          </a:prstGeom>
+          <a:noFill/>
+        </p:spPr>
+        <p:txBody>
+          <a:bodyPr wrap="square" anchor="t" lIns="0" rIns="0" tIns="0" bIns="0"/>
+          <a:lstStyle/>
+          <a:p>
+            <a:pPr algn="l"/>
+            <a:r>
+              <a:rPr sz="1100" b="1" i="0">
+                <a:solidFill>
+                  <a:srgbClr val="A9C8F0"/>
+                </a:solidFill>
+                <a:latin typeface="Calibri"/>
+              </a:rPr>
+              <a:t>MECHANICAL ENGINEERING  ·  Mechanical: Performance Outcome 6</a:t>
+            </a:r>
+          </a:p>
+        </p:txBody>
+      </p:sp>
+      <p:sp>
+        <p:nvSpPr>
+          <p:cNvPr id="3" name="TextBox 2"/>
+          <p:cNvSpPr txBox="1"/>
+          <p:nvPr/>
+        </p:nvSpPr>
+        <p:spPr>
+          <a:xfrm>
+            <a:off x="548640" y="566928"/>
+            <a:ext cx="11094415" cy="822960"/>
+          </a:xfrm>
+          <a:prstGeom prst="rect">
+            <a:avLst/>
+          </a:prstGeom>
+          <a:noFill/>
+        </p:spPr>
+        <p:txBody>
+          <a:bodyPr wrap="square" anchor="ctr" lIns="0" rIns="0" tIns="0" bIns="0"/>
+          <a:lstStyle/>
+          <a:p>
+            <a:pPr algn="l"/>
+            <a:r>
+              <a:rPr sz="3200" b="1" i="0">
+                <a:solidFill>
+                  <a:srgbClr val="FFFFFF"/>
+                </a:solidFill>
+                <a:latin typeface="Cambria"/>
+              </a:rPr>
+              <a:t>Exit ticket</a:t>
+            </a:r>
+          </a:p>
+        </p:txBody>
+      </p:sp>
+      <p:sp>
+        <p:nvSpPr>
+          <p:cNvPr id="4" name="Oval 3"/>
+          <p:cNvSpPr/>
+          <p:nvPr/>
+        </p:nvSpPr>
+        <p:spPr>
+          <a:xfrm>
+            <a:off x="548640" y="1737360"/>
+            <a:ext cx="502920" cy="502920"/>
+          </a:xfrm>
+          <a:prstGeom prst="ellipse">
+            <a:avLst/>
+          </a:prstGeom>
+          <a:solidFill>
+            <a:srgbClr val="E0463A"/>
+          </a:solidFill>
+          <a:ln>
+            <a:noFill/>
+          </a:ln>
+          <a:effectLst/>
+        </p:spPr>
+        <p:style>
+          <a:lnRef idx="1">
+            <a:schemeClr val="accent1"/>
+          </a:lnRef>
+          <a:fillRef idx="3">
+            <a:schemeClr val="accent1"/>
+          </a:fillRef>
+          <a:effectRef idx="2">
+            <a:schemeClr val="accent1"/>
+          </a:effectRef>
+          <a:fontRef idx="minor">
+            <a:schemeClr val="lt1"/>
+          </a:fontRef>
+        </p:style>
+        <p:txBody>
+          <a:bodyPr rtlCol="0" anchor="ctr" lIns="0" rIns="0" tIns="0" bIns="0"/>
+          <a:lstStyle/>
+          <a:p>
+            <a:pPr algn="ctr"/>
+            <a:r>
+              <a:rPr sz="1700" b="1">
+                <a:solidFill>
+                  <a:srgbClr val="FFFFFF"/>
+                </a:solidFill>
+                <a:latin typeface="Calibri"/>
+              </a:rPr>
+              <a:t>1</a:t>
+            </a:r>
+          </a:p>
+        </p:txBody>
+      </p:sp>
+      <p:sp>
+        <p:nvSpPr>
+          <p:cNvPr id="5" name="TextBox 4"/>
+          <p:cNvSpPr txBox="1"/>
+          <p:nvPr/>
+        </p:nvSpPr>
+        <p:spPr>
+          <a:xfrm>
+            <a:off x="1325880" y="1645920"/>
+            <a:ext cx="6583680" cy="822960"/>
+          </a:xfrm>
+          <a:prstGeom prst="rect">
+            <a:avLst/>
+          </a:prstGeom>
+          <a:noFill/>
+        </p:spPr>
+        <p:txBody>
+          <a:bodyPr wrap="square" anchor="ctr" lIns="0" rIns="0" tIns="0" bIns="0"/>
+          <a:lstStyle/>
+          <a:p>
+            <a:pPr algn="l"/>
+            <a:r>
+              <a:rPr sz="2000" b="0" i="0">
+                <a:solidFill>
+                  <a:srgbClr val="FFFFFF"/>
+                </a:solidFill>
+                <a:latin typeface="Calibri"/>
+              </a:rPr>
+              <a:t>What is a surface finish symbol for?</a:t>
+            </a:r>
+          </a:p>
+        </p:txBody>
+      </p:sp>
+      <p:sp>
+        <p:nvSpPr>
+          <p:cNvPr id="6" name="Oval 5"/>
+          <p:cNvSpPr/>
+          <p:nvPr/>
+        </p:nvSpPr>
+        <p:spPr>
+          <a:xfrm>
+            <a:off x="548640" y="2697480"/>
+            <a:ext cx="502920" cy="502920"/>
+          </a:xfrm>
+          <a:prstGeom prst="ellipse">
+            <a:avLst/>
+          </a:prstGeom>
+          <a:solidFill>
+            <a:srgbClr val="E0463A"/>
+          </a:solidFill>
+          <a:ln>
+            <a:noFill/>
+          </a:ln>
+          <a:effectLst/>
+        </p:spPr>
+        <p:style>
+          <a:lnRef idx="1">
+            <a:schemeClr val="accent1"/>
+          </a:lnRef>
+          <a:fillRef idx="3">
+            <a:schemeClr val="accent1"/>
+          </a:fillRef>
+          <a:effectRef idx="2">
+            <a:schemeClr val="accent1"/>
+          </a:effectRef>
+          <a:fontRef idx="minor">
+            <a:schemeClr val="lt1"/>
+          </a:fontRef>
+        </p:style>
+        <p:txBody>
+          <a:bodyPr rtlCol="0" anchor="ctr" lIns="0" rIns="0" tIns="0" bIns="0"/>
+          <a:lstStyle/>
+          <a:p>
+            <a:pPr algn="ctr"/>
+            <a:r>
+              <a:rPr sz="1700" b="1">
+                <a:solidFill>
+                  <a:srgbClr val="FFFFFF"/>
+                </a:solidFill>
+                <a:latin typeface="Calibri"/>
+              </a:rPr>
+              <a:t>2</a:t>
+            </a:r>
+          </a:p>
+        </p:txBody>
+      </p:sp>
+      <p:sp>
+        <p:nvSpPr>
+          <p:cNvPr id="7" name="TextBox 6"/>
+          <p:cNvSpPr txBox="1"/>
+          <p:nvPr/>
+        </p:nvSpPr>
+        <p:spPr>
+          <a:xfrm>
+            <a:off x="1325880" y="2606040"/>
+            <a:ext cx="6583680" cy="822960"/>
+          </a:xfrm>
+          <a:prstGeom prst="rect">
+            <a:avLst/>
+          </a:prstGeom>
+          <a:noFill/>
+        </p:spPr>
+        <p:txBody>
+          <a:bodyPr wrap="square" anchor="ctr" lIns="0" rIns="0" tIns="0" bIns="0"/>
+          <a:lstStyle/>
+          <a:p>
+            <a:pPr algn="l"/>
+            <a:r>
+              <a:rPr sz="2000" b="0" i="0">
+                <a:solidFill>
+                  <a:srgbClr val="FFFFFF"/>
+                </a:solidFill>
+                <a:latin typeface="Calibri"/>
+              </a:rPr>
+              <a:t>Why is SharePoint useful for teams?</a:t>
+            </a:r>
+          </a:p>
+        </p:txBody>
+      </p:sp>
+      <p:sp>
+        <p:nvSpPr>
+          <p:cNvPr id="8" name="Oval 7"/>
+          <p:cNvSpPr/>
+          <p:nvPr/>
+        </p:nvSpPr>
+        <p:spPr>
+          <a:xfrm>
+            <a:off x="548640" y="3657600"/>
+            <a:ext cx="502920" cy="502920"/>
+          </a:xfrm>
+          <a:prstGeom prst="ellipse">
+            <a:avLst/>
+          </a:prstGeom>
+          <a:solidFill>
+            <a:srgbClr val="E0463A"/>
+          </a:solidFill>
+          <a:ln>
+            <a:noFill/>
+          </a:ln>
+          <a:effectLst/>
+        </p:spPr>
+        <p:style>
+          <a:lnRef idx="1">
+            <a:schemeClr val="accent1"/>
+          </a:lnRef>
+          <a:fillRef idx="3">
+            <a:schemeClr val="accent1"/>
+          </a:fillRef>
+          <a:effectRef idx="2">
+            <a:schemeClr val="accent1"/>
+          </a:effectRef>
+          <a:fontRef idx="minor">
+            <a:schemeClr val="lt1"/>
+          </a:fontRef>
+        </p:style>
+        <p:txBody>
+          <a:bodyPr rtlCol="0" anchor="ctr" lIns="0" rIns="0" tIns="0" bIns="0"/>
+          <a:lstStyle/>
+          <a:p>
+            <a:pPr algn="ctr"/>
+            <a:r>
+              <a:rPr sz="1700" b="1">
+                <a:solidFill>
+                  <a:srgbClr val="FFFFFF"/>
+                </a:solidFill>
+                <a:latin typeface="Calibri"/>
+              </a:rPr>
+              <a:t>3</a:t>
+            </a:r>
+          </a:p>
+        </p:txBody>
+      </p:sp>
+      <p:sp>
+        <p:nvSpPr>
+          <p:cNvPr id="9" name="TextBox 8"/>
+          <p:cNvSpPr txBox="1"/>
+          <p:nvPr/>
+        </p:nvSpPr>
+        <p:spPr>
+          <a:xfrm>
+            <a:off x="1325880" y="3566160"/>
+            <a:ext cx="6583680" cy="822960"/>
+          </a:xfrm>
+          <a:prstGeom prst="rect">
+            <a:avLst/>
+          </a:prstGeom>
+          <a:noFill/>
+        </p:spPr>
+        <p:txBody>
+          <a:bodyPr wrap="square" anchor="ctr" lIns="0" rIns="0" tIns="0" bIns="0"/>
+          <a:lstStyle/>
+          <a:p>
+            <a:pPr algn="l"/>
+            <a:r>
+              <a:rPr sz="2000" b="0" i="0">
+                <a:solidFill>
+                  <a:srgbClr val="FFFFFF"/>
+                </a:solidFill>
+                <a:latin typeface="Calibri"/>
+              </a:rPr>
+              <a:t>How do you choose a communication format?</a:t>
+            </a:r>
+          </a:p>
+        </p:txBody>
+      </p:sp>
+      <p:sp>
+        <p:nvSpPr>
+          <p:cNvPr id="10" name="Rounded Rectangle 9"/>
+          <p:cNvSpPr/>
+          <p:nvPr/>
+        </p:nvSpPr>
+        <p:spPr>
+          <a:xfrm>
+            <a:off x="8229600" y="1645920"/>
+            <a:ext cx="3410712" cy="2926080"/>
+          </a:xfrm>
+          <a:prstGeom prst="roundRect">
+            <a:avLst>
+              <a:gd name="adj" fmla="val 8000"/>
+            </a:avLst>
+          </a:prstGeom>
+          <a:solidFill>
+            <a:srgbClr val="0645AD"/>
+          </a:solidFill>
+          <a:ln>
+            <a:noFill/>
+          </a:ln>
+          <a:effectLst/>
+        </p:spPr>
+        <p:style>
+          <a:lnRef idx="1">
+            <a:schemeClr val="accent1"/>
+          </a:lnRef>
+          <a:fillRef idx="3">
+            <a:schemeClr val="accent1"/>
+          </a:fillRef>
+          <a:effectRef idx="2">
+            <a:schemeClr val="accent1"/>
+          </a:effectRef>
+          <a:fontRef idx="minor">
+            <a:schemeClr val="lt1"/>
+          </a:fontRef>
+        </p:style>
+        <p:txBody>
+          <a:bodyPr rtlCol="0" anchor="ctr"/>
+          <a:lstStyle/>
+          <a:p/>
+        </p:txBody>
+      </p:sp>
+      <p:sp>
+        <p:nvSpPr>
+          <p:cNvPr id="11" name="TextBox 10"/>
+          <p:cNvSpPr txBox="1"/>
+          <p:nvPr/>
+        </p:nvSpPr>
+        <p:spPr>
+          <a:xfrm>
+            <a:off x="8503920" y="1874519"/>
+            <a:ext cx="2926080" cy="365760"/>
+          </a:xfrm>
+          <a:prstGeom prst="rect">
+            <a:avLst/>
+          </a:prstGeom>
+          <a:noFill/>
+        </p:spPr>
+        <p:txBody>
+          <a:bodyPr wrap="square" anchor="t" lIns="0" rIns="0" tIns="0" bIns="0"/>
+          <a:lstStyle/>
+          <a:p>
+            <a:pPr algn="l"/>
+            <a:r>
+              <a:rPr sz="1300" b="1" i="0">
+                <a:solidFill>
+                  <a:srgbClr val="A9C8F0"/>
+                </a:solidFill>
+                <a:latin typeface="Calibri"/>
+              </a:rPr>
+              <a:t>REVISE THIS TOPIC</a:t>
+            </a:r>
+          </a:p>
+        </p:txBody>
+      </p:sp>
+      <p:sp>
+        <p:nvSpPr>
+          <p:cNvPr id="12" name="TextBox 11"/>
+          <p:cNvSpPr txBox="1"/>
+          <p:nvPr/>
+        </p:nvSpPr>
+        <p:spPr>
+          <a:xfrm>
+            <a:off x="8503920" y="2286000"/>
+            <a:ext cx="2926080" cy="548640"/>
+          </a:xfrm>
+          <a:prstGeom prst="rect">
+            <a:avLst/>
+          </a:prstGeom>
+          <a:noFill/>
+        </p:spPr>
+        <p:txBody>
+          <a:bodyPr wrap="square" anchor="t" lIns="0" rIns="0" tIns="0" bIns="0"/>
+          <a:lstStyle/>
+          <a:p>
+            <a:pPr algn="l"/>
+            <a:r>
+              <a:rPr sz="1400" b="0" i="0">
+                <a:solidFill>
+                  <a:srgbClr val="FFFFFF"/>
+                </a:solidFill>
+                <a:latin typeface="Calibri"/>
+              </a:rPr>
+              <a:t>Revision notes for this lesson are on the study wiki:</a:t>
+            </a:r>
+          </a:p>
+        </p:txBody>
+      </p:sp>
+      <p:sp>
+        <p:nvSpPr>
+          <p:cNvPr id="13" name="TextBox 12"/>
+          <p:cNvSpPr txBox="1"/>
+          <p:nvPr/>
+        </p:nvSpPr>
+        <p:spPr>
+          <a:xfrm>
+            <a:off x="8503920" y="2926080"/>
+            <a:ext cx="2926080" cy="1463040"/>
+          </a:xfrm>
+          <a:prstGeom prst="rect">
+            <a:avLst/>
+          </a:prstGeom>
+          <a:noFill/>
+        </p:spPr>
+        <p:txBody>
+          <a:bodyPr wrap="square" anchor="t" lIns="0" rIns="0" tIns="0" bIns="0"/>
+          <a:lstStyle/>
+          <a:p>
+            <a:pPr algn="l"/>
+            <a:r>
+              <a:rPr sz="2000" b="1" i="0">
+                <a:solidFill>
+                  <a:srgbClr val="FFFFFF"/>
+                </a:solidFill>
+                <a:latin typeface="Cambria"/>
+              </a:rPr>
+              <a:t>Practical Criteria</a:t>
+            </a:r>
+          </a:p>
+        </p:txBody>
+      </p:sp>
+      <p:sp>
+        <p:nvSpPr>
+          <p:cNvPr id="14" name="TextBox 13"/>
+          <p:cNvSpPr txBox="1"/>
+          <p:nvPr/>
+        </p:nvSpPr>
+        <p:spPr>
+          <a:xfrm>
+            <a:off x="548640" y="5669280"/>
+            <a:ext cx="11094415" cy="548640"/>
+          </a:xfrm>
+          <a:prstGeom prst="rect">
+            <a:avLst/>
+          </a:prstGeom>
+          <a:noFill/>
+        </p:spPr>
+        <p:txBody>
+          <a:bodyPr wrap="square" anchor="t" lIns="0" rIns="0" tIns="0" bIns="0"/>
+          <a:lstStyle/>
+          <a:p>
+            <a:pPr algn="l"/>
+            <a:r>
+              <a:rPr sz="1200" b="0" i="0">
+                <a:solidFill>
+                  <a:srgbClr val="A9C8F0"/>
+                </a:solidFill>
+                <a:latin typeface="Calibri"/>
+              </a:rPr>
+              <a:t>https://lana6478.github.io/T-level-Design-Development-Engineering-Manufacturing/#/02-occupational-specialism/02-practical-criteria.md</a:t>
+            </a:r>
+          </a:p>
+        </p:txBody>
+      </p:sp>
+    </p:spTree>
+  </p:cSld>
+  <p:clrMapOvr>
+    <a:masterClrMapping/>
+  </p:clrMapOvr>
+</p:sld>
+</file>
+
 <file path=ppt/slides/slide2.xml><?xml version="1.0" encoding="utf-8"?>
 <p:sld xmlns:a="http://schemas.openxmlformats.org/drawingml/2006/main" xmlns:p="http://schemas.openxmlformats.org/presentationml/2006/main" xmlns:r="http://schemas.openxmlformats.org/officeDocument/2006/relationships">
   <p:cSld>
@@ -4685,22 +6609,93 @@
       </p:sp>
       <p:sp>
         <p:nvSpPr>
-          <p:cNvPr id="6" name="Rounded Rectangle 5"/>
+          <p:cNvPr id="6" name="TextBox 5"/>
+          <p:cNvSpPr txBox="1"/>
+          <p:nvPr/>
+        </p:nvSpPr>
+        <p:spPr>
+          <a:xfrm>
+            <a:off x="548640" y="1554480"/>
+            <a:ext cx="6720840" cy="4617720"/>
+          </a:xfrm>
+          <a:prstGeom prst="rect">
+            <a:avLst/>
+          </a:prstGeom>
+          <a:noFill/>
+        </p:spPr>
+        <p:txBody>
+          <a:bodyPr wrap="square" lIns="0" rIns="0" tIns="0" bIns="0">
+            <a:spAutoFit/>
+          </a:bodyPr>
+          <a:lstStyle/>
+          <a:p>
+            <a:pPr>
+              <a:spcAft>
+                <a:spcPts val="1320"/>
+              </a:spcAft>
+            </a:pPr>
+            <a:r>
+              <a:rPr sz="2200" b="0">
+                <a:solidFill>
+                  <a:srgbClr val="202122"/>
+                </a:solidFill>
+                <a:latin typeface="Calibri"/>
+              </a:rPr>
+              <a:t>Technical documents, such as specifications and drawings, are produced, amended, checked and managed with digital tools: CAD, document management systems, SharePoint and spreadsheets.</a:t>
+            </a:r>
+          </a:p>
+          <a:p>
+            <a:pPr>
+              <a:spcAft>
+                <a:spcPts val="1320"/>
+              </a:spcAft>
+            </a:pPr>
+            <a:r>
+              <a:rPr sz="2200" b="0">
+                <a:solidFill>
+                  <a:srgbClr val="202122"/>
+                </a:solidFill>
+                <a:latin typeface="Calibri"/>
+              </a:rPr>
+              <a:t>Version control keeps one current version: revision letters, change notes and a record of what changed and why. Everyone must work from the latest issue.</a:t>
+            </a:r>
+          </a:p>
+          <a:p>
+            <a:pPr>
+              <a:spcAft>
+                <a:spcPts val="1320"/>
+              </a:spcAft>
+            </a:pPr>
+            <a:r>
+              <a:rPr sz="2200" b="0">
+                <a:solidFill>
+                  <a:srgbClr val="202122"/>
+                </a:solidFill>
+                <a:latin typeface="Calibri"/>
+              </a:rPr>
+              <a:t>Drawings are annotated with geometrical tolerances, limits and fits, and surface finishes, so the part can be made correctly.</a:t>
+            </a:r>
+          </a:p>
+        </p:txBody>
+      </p:sp>
+      <p:sp>
+        <p:nvSpPr>
+          <p:cNvPr id="7" name="Rounded Rectangle 6"/>
           <p:cNvSpPr/>
           <p:nvPr/>
         </p:nvSpPr>
         <p:spPr>
           <a:xfrm>
-            <a:off x="548640" y="1600200"/>
-            <a:ext cx="5410047" cy="2148840"/>
+            <a:off x="7772400" y="1554480"/>
+            <a:ext cx="3867912" cy="4526280"/>
           </a:xfrm>
           <a:prstGeom prst="roundRect">
             <a:avLst>
-              <a:gd name="adj" fmla="val 6000"/>
+              <a:gd name="adj" fmla="val 8000"/>
             </a:avLst>
           </a:prstGeom>
           <a:solidFill>
-            <a:srgbClr val="EAF3FF"/>
+            <a:srgbClr val="03306E"/>
           </a:solidFill>
           <a:ln>
             <a:noFill/>
@@ -4729,14 +6724,14 @@
       </p:sp>
       <p:sp>
         <p:nvSpPr>
-          <p:cNvPr id="7" name="Oval 6"/>
+          <p:cNvPr id="8" name="Oval 7"/>
           <p:cNvSpPr/>
           <p:nvPr/>
         </p:nvSpPr>
         <p:spPr>
           <a:xfrm>
-            <a:off x="777240" y="1828800"/>
-            <a:ext cx="457200" cy="457200"/>
+            <a:off x="8046720" y="1828800"/>
+            <a:ext cx="548640" cy="548640"/>
           </a:xfrm>
           <a:prstGeom prst="ellipse">
             <a:avLst/>
@@ -4769,46 +6764,13 @@
           <a:p>
             <a:pPr algn="ctr"/>
             <a:r>
-              <a:rPr sz="1500" b="1">
+              <a:rPr sz="1300" b="1">
                 <a:solidFill>
                   <a:srgbClr val="FFFFFF"/>
                 </a:solidFill>
                 <a:latin typeface="Calibri"/>
               </a:rPr>
-              <a:t>1</a:t>
-            </a:r>
-          </a:p>
-        </p:txBody>
-      </p:sp>
-      <p:sp>
-        <p:nvSpPr>
-          <p:cNvPr id="8" name="TextBox 7"/>
-          <p:cNvSpPr txBox="1"/>
-          <p:nvPr/>
-        </p:nvSpPr>
-        <p:spPr>
-          <a:xfrm>
-            <a:off x="1371600" y="1801368"/>
-            <a:ext cx="4404207" cy="512064"/>
-          </a:xfrm>
-          <a:prstGeom prst="rect">
-            <a:avLst/>
-          </a:prstGeom>
-          <a:noFill/>
-        </p:spPr>
-        <p:txBody>
-          <a:bodyPr wrap="square" anchor="ctr" lIns="0" rIns="0" tIns="0" bIns="0"/>
-          <a:lstStyle/>
-          <a:p>
-            <a:pPr algn="l"/>
-            <a:r>
-              <a:rPr sz="1900" b="1" i="0">
-                <a:solidFill>
-                  <a:srgbClr val="03306E"/>
-                </a:solidFill>
-                <a:latin typeface="Calibri"/>
-              </a:rPr>
-              <a:t>Documents</a:t>
+              <a:t>e.g.</a:t>
             </a:r>
           </a:p>
         </p:txBody>
@@ -4821,8 +6783,8 @@
         </p:nvSpPr>
         <p:spPr>
           <a:xfrm>
-            <a:off x="777240" y="2468880"/>
-            <a:ext cx="4952847" cy="1143000"/>
+            <a:off x="8046720" y="2560320"/>
+            <a:ext cx="3291840" cy="365760"/>
           </a:xfrm>
           <a:prstGeom prst="rect">
             <a:avLst/>
@@ -4835,502 +6797,46 @@
           <a:p>
             <a:pPr algn="l"/>
             <a:r>
-              <a:rPr sz="2000" b="0" i="0">
-                <a:solidFill>
-                  <a:srgbClr val="202122"/>
-                </a:solidFill>
-                <a:latin typeface="Calibri"/>
-              </a:rPr>
-              <a:t>Design specifications and engineering drawings.</a:t>
-            </a:r>
-          </a:p>
-        </p:txBody>
-      </p:sp>
-      <p:sp>
-        <p:nvSpPr>
-          <p:cNvPr id="10" name="Rounded Rectangle 9"/>
-          <p:cNvSpPr/>
-          <p:nvPr/>
-        </p:nvSpPr>
-        <p:spPr>
-          <a:xfrm>
-            <a:off x="6233007" y="1600200"/>
-            <a:ext cx="5410047" cy="2148840"/>
-          </a:xfrm>
-          <a:prstGeom prst="roundRect">
-            <a:avLst>
-              <a:gd name="adj" fmla="val 6000"/>
-            </a:avLst>
-          </a:prstGeom>
-          <a:solidFill>
-            <a:srgbClr val="EAF3FF"/>
-          </a:solidFill>
-          <a:ln>
-            <a:noFill/>
-          </a:ln>
-          <a:effectLst/>
-        </p:spPr>
-        <p:style>
-          <a:lnRef idx="1">
-            <a:schemeClr val="accent1"/>
-          </a:lnRef>
-          <a:fillRef idx="3">
-            <a:schemeClr val="accent1"/>
-          </a:fillRef>
-          <a:effectRef idx="2">
-            <a:schemeClr val="accent1"/>
-          </a:effectRef>
-          <a:fontRef idx="minor">
-            <a:schemeClr val="lt1"/>
-          </a:fontRef>
-        </p:style>
-        <p:txBody>
-          <a:bodyPr rtlCol="0" anchor="ctr"/>
-          <a:lstStyle/>
-          <a:p/>
-        </p:txBody>
-      </p:sp>
-      <p:sp>
-        <p:nvSpPr>
-          <p:cNvPr id="11" name="Oval 10"/>
-          <p:cNvSpPr/>
-          <p:nvPr/>
-        </p:nvSpPr>
-        <p:spPr>
-          <a:xfrm>
-            <a:off x="6461607" y="1828800"/>
-            <a:ext cx="457200" cy="457200"/>
-          </a:xfrm>
-          <a:prstGeom prst="ellipse">
-            <a:avLst/>
-          </a:prstGeom>
-          <a:solidFill>
-            <a:srgbClr val="E0463A"/>
-          </a:solidFill>
-          <a:ln>
-            <a:noFill/>
-          </a:ln>
-          <a:effectLst/>
-        </p:spPr>
-        <p:style>
-          <a:lnRef idx="1">
-            <a:schemeClr val="accent1"/>
-          </a:lnRef>
-          <a:fillRef idx="3">
-            <a:schemeClr val="accent1"/>
-          </a:fillRef>
-          <a:effectRef idx="2">
-            <a:schemeClr val="accent1"/>
-          </a:effectRef>
-          <a:fontRef idx="minor">
-            <a:schemeClr val="lt1"/>
-          </a:fontRef>
-        </p:style>
-        <p:txBody>
-          <a:bodyPr rtlCol="0" anchor="ctr" lIns="0" rIns="0" tIns="0" bIns="0"/>
-          <a:lstStyle/>
-          <a:p>
-            <a:pPr algn="ctr"/>
-            <a:r>
-              <a:rPr sz="1500" b="1">
+              <a:rPr sz="1300" b="1" i="0">
+                <a:solidFill>
+                  <a:srgbClr val="A9C8F0"/>
+                </a:solidFill>
+                <a:latin typeface="Calibri"/>
+              </a:rPr>
+              <a:t>EXAMPLE</a:t>
+            </a:r>
+          </a:p>
+        </p:txBody>
+      </p:sp>
+      <p:sp>
+        <p:nvSpPr>
+          <p:cNvPr id="10" name="TextBox 9"/>
+          <p:cNvSpPr txBox="1"/>
+          <p:nvPr/>
+        </p:nvSpPr>
+        <p:spPr>
+          <a:xfrm>
+            <a:off x="8046720" y="2971800"/>
+            <a:ext cx="3291840" cy="2971800"/>
+          </a:xfrm>
+          <a:prstGeom prst="rect">
+            <a:avLst/>
+          </a:prstGeom>
+          <a:noFill/>
+        </p:spPr>
+        <p:txBody>
+          <a:bodyPr wrap="square" anchor="t" lIns="0" rIns="0" tIns="0" bIns="0"/>
+          <a:lstStyle/>
+          <a:p>
+            <a:pPr algn="l"/>
+            <a:r>
+              <a:rPr sz="1900" b="0" i="0">
                 <a:solidFill>
                   <a:srgbClr val="FFFFFF"/>
                 </a:solidFill>
-                <a:latin typeface="Calibri"/>
-              </a:rPr>
-              <a:t>2</a:t>
-            </a:r>
-          </a:p>
-        </p:txBody>
-      </p:sp>
-      <p:sp>
-        <p:nvSpPr>
-          <p:cNvPr id="12" name="TextBox 11"/>
-          <p:cNvSpPr txBox="1"/>
-          <p:nvPr/>
-        </p:nvSpPr>
-        <p:spPr>
-          <a:xfrm>
-            <a:off x="7055967" y="1801368"/>
-            <a:ext cx="4404207" cy="512064"/>
-          </a:xfrm>
-          <a:prstGeom prst="rect">
-            <a:avLst/>
-          </a:prstGeom>
-          <a:noFill/>
-        </p:spPr>
-        <p:txBody>
-          <a:bodyPr wrap="square" anchor="ctr" lIns="0" rIns="0" tIns="0" bIns="0"/>
-          <a:lstStyle/>
-          <a:p>
-            <a:pPr algn="l"/>
-            <a:r>
-              <a:rPr sz="1900" b="1" i="0">
-                <a:solidFill>
-                  <a:srgbClr val="03306E"/>
-                </a:solidFill>
-                <a:latin typeface="Calibri"/>
-              </a:rPr>
-              <a:t>Digital tools</a:t>
-            </a:r>
-          </a:p>
-        </p:txBody>
-      </p:sp>
-      <p:sp>
-        <p:nvSpPr>
-          <p:cNvPr id="13" name="TextBox 12"/>
-          <p:cNvSpPr txBox="1"/>
-          <p:nvPr/>
-        </p:nvSpPr>
-        <p:spPr>
-          <a:xfrm>
-            <a:off x="6461607" y="2468880"/>
-            <a:ext cx="4952847" cy="1143000"/>
-          </a:xfrm>
-          <a:prstGeom prst="rect">
-            <a:avLst/>
-          </a:prstGeom>
-          <a:noFill/>
-        </p:spPr>
-        <p:txBody>
-          <a:bodyPr wrap="square" anchor="t" lIns="0" rIns="0" tIns="0" bIns="0"/>
-          <a:lstStyle/>
-          <a:p>
-            <a:pPr algn="l"/>
-            <a:r>
-              <a:rPr sz="2000" b="0" i="0">
-                <a:solidFill>
-                  <a:srgbClr val="202122"/>
-                </a:solidFill>
-                <a:latin typeface="Calibri"/>
-              </a:rPr>
-              <a:t>CAD, document management systems, SharePoint, spreadsheets.</a:t>
-            </a:r>
-          </a:p>
-        </p:txBody>
-      </p:sp>
-      <p:sp>
-        <p:nvSpPr>
-          <p:cNvPr id="14" name="Rounded Rectangle 13"/>
-          <p:cNvSpPr/>
-          <p:nvPr/>
-        </p:nvSpPr>
-        <p:spPr>
-          <a:xfrm>
-            <a:off x="548640" y="4023360"/>
-            <a:ext cx="5410047" cy="2148840"/>
-          </a:xfrm>
-          <a:prstGeom prst="roundRect">
-            <a:avLst>
-              <a:gd name="adj" fmla="val 6000"/>
-            </a:avLst>
-          </a:prstGeom>
-          <a:solidFill>
-            <a:srgbClr val="EAF3FF"/>
-          </a:solidFill>
-          <a:ln>
-            <a:noFill/>
-          </a:ln>
-          <a:effectLst/>
-        </p:spPr>
-        <p:style>
-          <a:lnRef idx="1">
-            <a:schemeClr val="accent1"/>
-          </a:lnRef>
-          <a:fillRef idx="3">
-            <a:schemeClr val="accent1"/>
-          </a:fillRef>
-          <a:effectRef idx="2">
-            <a:schemeClr val="accent1"/>
-          </a:effectRef>
-          <a:fontRef idx="minor">
-            <a:schemeClr val="lt1"/>
-          </a:fontRef>
-        </p:style>
-        <p:txBody>
-          <a:bodyPr rtlCol="0" anchor="ctr"/>
-          <a:lstStyle/>
-          <a:p/>
-        </p:txBody>
-      </p:sp>
-      <p:sp>
-        <p:nvSpPr>
-          <p:cNvPr id="15" name="Oval 14"/>
-          <p:cNvSpPr/>
-          <p:nvPr/>
-        </p:nvSpPr>
-        <p:spPr>
-          <a:xfrm>
-            <a:off x="777240" y="4251960"/>
-            <a:ext cx="457200" cy="457200"/>
-          </a:xfrm>
-          <a:prstGeom prst="ellipse">
-            <a:avLst/>
-          </a:prstGeom>
-          <a:solidFill>
-            <a:srgbClr val="E0463A"/>
-          </a:solidFill>
-          <a:ln>
-            <a:noFill/>
-          </a:ln>
-          <a:effectLst/>
-        </p:spPr>
-        <p:style>
-          <a:lnRef idx="1">
-            <a:schemeClr val="accent1"/>
-          </a:lnRef>
-          <a:fillRef idx="3">
-            <a:schemeClr val="accent1"/>
-          </a:fillRef>
-          <a:effectRef idx="2">
-            <a:schemeClr val="accent1"/>
-          </a:effectRef>
-          <a:fontRef idx="minor">
-            <a:schemeClr val="lt1"/>
-          </a:fontRef>
-        </p:style>
-        <p:txBody>
-          <a:bodyPr rtlCol="0" anchor="ctr" lIns="0" rIns="0" tIns="0" bIns="0"/>
-          <a:lstStyle/>
-          <a:p>
-            <a:pPr algn="ctr"/>
-            <a:r>
-              <a:rPr sz="1500" b="1">
-                <a:solidFill>
-                  <a:srgbClr val="FFFFFF"/>
-                </a:solidFill>
-                <a:latin typeface="Calibri"/>
-              </a:rPr>
-              <a:t>3</a:t>
-            </a:r>
-          </a:p>
-        </p:txBody>
-      </p:sp>
-      <p:sp>
-        <p:nvSpPr>
-          <p:cNvPr id="16" name="TextBox 15"/>
-          <p:cNvSpPr txBox="1"/>
-          <p:nvPr/>
-        </p:nvSpPr>
-        <p:spPr>
-          <a:xfrm>
-            <a:off x="1371600" y="4224528"/>
-            <a:ext cx="4404207" cy="512064"/>
-          </a:xfrm>
-          <a:prstGeom prst="rect">
-            <a:avLst/>
-          </a:prstGeom>
-          <a:noFill/>
-        </p:spPr>
-        <p:txBody>
-          <a:bodyPr wrap="square" anchor="ctr" lIns="0" rIns="0" tIns="0" bIns="0"/>
-          <a:lstStyle/>
-          <a:p>
-            <a:pPr algn="l"/>
-            <a:r>
-              <a:rPr sz="1900" b="1" i="0">
-                <a:solidFill>
-                  <a:srgbClr val="03306E"/>
-                </a:solidFill>
-                <a:latin typeface="Calibri"/>
-              </a:rPr>
-              <a:t>Version control</a:t>
-            </a:r>
-          </a:p>
-        </p:txBody>
-      </p:sp>
-      <p:sp>
-        <p:nvSpPr>
-          <p:cNvPr id="17" name="TextBox 16"/>
-          <p:cNvSpPr txBox="1"/>
-          <p:nvPr/>
-        </p:nvSpPr>
-        <p:spPr>
-          <a:xfrm>
-            <a:off x="777240" y="4892040"/>
-            <a:ext cx="4952847" cy="1143000"/>
-          </a:xfrm>
-          <a:prstGeom prst="rect">
-            <a:avLst/>
-          </a:prstGeom>
-          <a:noFill/>
-        </p:spPr>
-        <p:txBody>
-          <a:bodyPr wrap="square" anchor="t" lIns="0" rIns="0" tIns="0" bIns="0"/>
-          <a:lstStyle/>
-          <a:p>
-            <a:pPr algn="l"/>
-            <a:r>
-              <a:rPr sz="2000" b="0" i="0">
-                <a:solidFill>
-                  <a:srgbClr val="202122"/>
-                </a:solidFill>
-                <a:latin typeface="Calibri"/>
-              </a:rPr>
-              <a:t>Revision letters, change notes, one current version.</a:t>
-            </a:r>
-          </a:p>
-        </p:txBody>
-      </p:sp>
-      <p:sp>
-        <p:nvSpPr>
-          <p:cNvPr id="18" name="Rounded Rectangle 17"/>
-          <p:cNvSpPr/>
-          <p:nvPr/>
-        </p:nvSpPr>
-        <p:spPr>
-          <a:xfrm>
-            <a:off x="6233007" y="4023360"/>
-            <a:ext cx="5410047" cy="2148840"/>
-          </a:xfrm>
-          <a:prstGeom prst="roundRect">
-            <a:avLst>
-              <a:gd name="adj" fmla="val 6000"/>
-            </a:avLst>
-          </a:prstGeom>
-          <a:solidFill>
-            <a:srgbClr val="EAF3FF"/>
-          </a:solidFill>
-          <a:ln>
-            <a:noFill/>
-          </a:ln>
-          <a:effectLst/>
-        </p:spPr>
-        <p:style>
-          <a:lnRef idx="1">
-            <a:schemeClr val="accent1"/>
-          </a:lnRef>
-          <a:fillRef idx="3">
-            <a:schemeClr val="accent1"/>
-          </a:fillRef>
-          <a:effectRef idx="2">
-            <a:schemeClr val="accent1"/>
-          </a:effectRef>
-          <a:fontRef idx="minor">
-            <a:schemeClr val="lt1"/>
-          </a:fontRef>
-        </p:style>
-        <p:txBody>
-          <a:bodyPr rtlCol="0" anchor="ctr"/>
-          <a:lstStyle/>
-          <a:p/>
-        </p:txBody>
-      </p:sp>
-      <p:sp>
-        <p:nvSpPr>
-          <p:cNvPr id="19" name="Oval 18"/>
-          <p:cNvSpPr/>
-          <p:nvPr/>
-        </p:nvSpPr>
-        <p:spPr>
-          <a:xfrm>
-            <a:off x="6461607" y="4251960"/>
-            <a:ext cx="457200" cy="457200"/>
-          </a:xfrm>
-          <a:prstGeom prst="ellipse">
-            <a:avLst/>
-          </a:prstGeom>
-          <a:solidFill>
-            <a:srgbClr val="E0463A"/>
-          </a:solidFill>
-          <a:ln>
-            <a:noFill/>
-          </a:ln>
-          <a:effectLst/>
-        </p:spPr>
-        <p:style>
-          <a:lnRef idx="1">
-            <a:schemeClr val="accent1"/>
-          </a:lnRef>
-          <a:fillRef idx="3">
-            <a:schemeClr val="accent1"/>
-          </a:fillRef>
-          <a:effectRef idx="2">
-            <a:schemeClr val="accent1"/>
-          </a:effectRef>
-          <a:fontRef idx="minor">
-            <a:schemeClr val="lt1"/>
-          </a:fontRef>
-        </p:style>
-        <p:txBody>
-          <a:bodyPr rtlCol="0" anchor="ctr" lIns="0" rIns="0" tIns="0" bIns="0"/>
-          <a:lstStyle/>
-          <a:p>
-            <a:pPr algn="ctr"/>
-            <a:r>
-              <a:rPr sz="1500" b="1">
-                <a:solidFill>
-                  <a:srgbClr val="FFFFFF"/>
-                </a:solidFill>
-                <a:latin typeface="Calibri"/>
-              </a:rPr>
-              <a:t>4</a:t>
-            </a:r>
-          </a:p>
-        </p:txBody>
-      </p:sp>
-      <p:sp>
-        <p:nvSpPr>
-          <p:cNvPr id="20" name="TextBox 19"/>
-          <p:cNvSpPr txBox="1"/>
-          <p:nvPr/>
-        </p:nvSpPr>
-        <p:spPr>
-          <a:xfrm>
-            <a:off x="7055967" y="4224528"/>
-            <a:ext cx="4404207" cy="512064"/>
-          </a:xfrm>
-          <a:prstGeom prst="rect">
-            <a:avLst/>
-          </a:prstGeom>
-          <a:noFill/>
-        </p:spPr>
-        <p:txBody>
-          <a:bodyPr wrap="square" anchor="ctr" lIns="0" rIns="0" tIns="0" bIns="0"/>
-          <a:lstStyle/>
-          <a:p>
-            <a:pPr algn="l"/>
-            <a:r>
-              <a:rPr sz="1900" b="1" i="0">
-                <a:solidFill>
-                  <a:srgbClr val="03306E"/>
-                </a:solidFill>
-                <a:latin typeface="Calibri"/>
-              </a:rPr>
-              <a:t>Annotation</a:t>
-            </a:r>
-          </a:p>
-        </p:txBody>
-      </p:sp>
-      <p:sp>
-        <p:nvSpPr>
-          <p:cNvPr id="21" name="TextBox 20"/>
-          <p:cNvSpPr txBox="1"/>
-          <p:nvPr/>
-        </p:nvSpPr>
-        <p:spPr>
-          <a:xfrm>
-            <a:off x="6461607" y="4892040"/>
-            <a:ext cx="4952847" cy="1143000"/>
-          </a:xfrm>
-          <a:prstGeom prst="rect">
-            <a:avLst/>
-          </a:prstGeom>
-          <a:noFill/>
-        </p:spPr>
-        <p:txBody>
-          <a:bodyPr wrap="square" anchor="t" lIns="0" rIns="0" tIns="0" bIns="0"/>
-          <a:lstStyle/>
-          <a:p>
-            <a:pPr algn="l"/>
-            <a:r>
-              <a:rPr sz="2000" b="0" i="0">
-                <a:solidFill>
-                  <a:srgbClr val="202122"/>
-                </a:solidFill>
-                <a:latin typeface="Calibri"/>
-              </a:rPr>
-              <a:t>Geometrical tolerances, limits and fits, surface finishes.</a:t>
+                <a:latin typeface="Cambria"/>
+              </a:rPr>
+              <a:t>Two teams working from revision B and revision C of the same drawing make parts that don't fit: version control prevents this.</a:t>
             </a:r>
           </a:p>
         </p:txBody>
@@ -5422,7 +6928,7 @@
                 </a:solidFill>
                 <a:latin typeface="Cambria"/>
               </a:rPr>
-              <a:t>Communicating design information</a:t>
+              <a:t>Managing documentation</a:t>
             </a:r>
           </a:p>
         </p:txBody>
@@ -5502,88 +7008,11 @@
         <p:spPr>
           <a:xfrm>
             <a:off x="548640" y="1600200"/>
-            <a:ext cx="5364327" cy="640080"/>
+            <a:ext cx="5410047" cy="2148840"/>
           </a:xfrm>
           <a:prstGeom prst="roundRect">
             <a:avLst>
-              <a:gd name="adj" fmla="val 15000"/>
-            </a:avLst>
-          </a:prstGeom>
-          <a:solidFill>
-            <a:srgbClr val="03306E"/>
-          </a:solidFill>
-          <a:ln>
-            <a:noFill/>
-          </a:ln>
-          <a:effectLst/>
-        </p:spPr>
-        <p:style>
-          <a:lnRef idx="1">
-            <a:schemeClr val="accent1"/>
-          </a:lnRef>
-          <a:fillRef idx="3">
-            <a:schemeClr val="accent1"/>
-          </a:fillRef>
-          <a:effectRef idx="2">
-            <a:schemeClr val="accent1"/>
-          </a:effectRef>
-          <a:fontRef idx="minor">
-            <a:schemeClr val="lt1"/>
-          </a:fontRef>
-        </p:style>
-        <p:txBody>
-          <a:bodyPr rtlCol="0" anchor="ctr"/>
-          <a:lstStyle/>
-          <a:p/>
-        </p:txBody>
-      </p:sp>
-      <p:sp>
-        <p:nvSpPr>
-          <p:cNvPr id="7" name="TextBox 6"/>
-          <p:cNvSpPr txBox="1"/>
-          <p:nvPr/>
-        </p:nvSpPr>
-        <p:spPr>
-          <a:xfrm>
-            <a:off x="777240" y="1600200"/>
-            <a:ext cx="4907127" cy="640080"/>
-          </a:xfrm>
-          <a:prstGeom prst="rect">
-            <a:avLst/>
-          </a:prstGeom>
-          <a:noFill/>
-        </p:spPr>
-        <p:txBody>
-          <a:bodyPr wrap="square" anchor="ctr" lIns="0" rIns="0" tIns="0" bIns="0"/>
-          <a:lstStyle/>
-          <a:p>
-            <a:pPr algn="l"/>
-            <a:r>
-              <a:rPr sz="2000" b="1" i="0">
-                <a:solidFill>
-                  <a:srgbClr val="FFFFFF"/>
-                </a:solidFill>
-                <a:latin typeface="Calibri"/>
-              </a:rPr>
-              <a:t>Formats</a:t>
-            </a:r>
-          </a:p>
-        </p:txBody>
-      </p:sp>
-      <p:sp>
-        <p:nvSpPr>
-          <p:cNvPr id="8" name="Rounded Rectangle 7"/>
-          <p:cNvSpPr/>
-          <p:nvPr/>
-        </p:nvSpPr>
-        <p:spPr>
-          <a:xfrm>
-            <a:off x="548640" y="2377440"/>
-            <a:ext cx="5364327" cy="3794760"/>
-          </a:xfrm>
-          <a:prstGeom prst="roundRect">
-            <a:avLst>
-              <a:gd name="adj" fmla="val 4000"/>
+              <a:gd name="adj" fmla="val 6000"/>
             </a:avLst>
           </a:prstGeom>
           <a:solidFill>
@@ -5616,129 +7045,20 @@
       </p:sp>
       <p:sp>
         <p:nvSpPr>
-          <p:cNvPr id="9" name="TextBox 8"/>
-          <p:cNvSpPr txBox="1"/>
-          <p:nvPr/>
-        </p:nvSpPr>
-        <p:spPr>
-          <a:xfrm>
-            <a:off x="822959" y="2606040"/>
-            <a:ext cx="4815687" cy="3337560"/>
-          </a:xfrm>
-          <a:prstGeom prst="rect">
-            <a:avLst/>
-          </a:prstGeom>
-          <a:noFill/>
-        </p:spPr>
-        <p:txBody>
-          <a:bodyPr wrap="square" lIns="0" rIns="0" tIns="0" bIns="0">
-            <a:spAutoFit/>
-          </a:bodyPr>
-          <a:lstStyle/>
-          <a:p>
-            <a:pPr marL="274320" indent="-274320">
-              <a:spcAft>
-                <a:spcPts val="990"/>
-              </a:spcAft>
-              <a:buClr>
-                <a:srgbClr val="0645AD"/>
-              </a:buClr>
-              <a:buFont typeface="Arial"/>
-              <a:buChar char="•"/>
-            </a:pPr>
-            <a:r>
-              <a:rPr sz="2200" b="0">
-                <a:solidFill>
-                  <a:srgbClr val="202122"/>
-                </a:solidFill>
-                <a:latin typeface="Calibri"/>
-              </a:rPr>
-              <a:t>Sketches and schemes</a:t>
-            </a:r>
-          </a:p>
-          <a:p>
-            <a:pPr marL="274320" indent="-274320">
-              <a:spcAft>
-                <a:spcPts val="990"/>
-              </a:spcAft>
-              <a:buClr>
-                <a:srgbClr val="0645AD"/>
-              </a:buClr>
-              <a:buFont typeface="Arial"/>
-              <a:buChar char="•"/>
-            </a:pPr>
-            <a:r>
-              <a:rPr sz="2200" b="0">
-                <a:solidFill>
-                  <a:srgbClr val="202122"/>
-                </a:solidFill>
-                <a:latin typeface="Calibri"/>
-              </a:rPr>
-              <a:t>Detailed drawings and diagrams</a:t>
-            </a:r>
-          </a:p>
-          <a:p>
-            <a:pPr marL="274320" indent="-274320">
-              <a:spcAft>
-                <a:spcPts val="990"/>
-              </a:spcAft>
-              <a:buClr>
-                <a:srgbClr val="0645AD"/>
-              </a:buClr>
-              <a:buFont typeface="Arial"/>
-              <a:buChar char="•"/>
-            </a:pPr>
-            <a:r>
-              <a:rPr sz="2200" b="0">
-                <a:solidFill>
-                  <a:srgbClr val="202122"/>
-                </a:solidFill>
-                <a:latin typeface="Calibri"/>
-              </a:rPr>
-              <a:t>Models</a:t>
-            </a:r>
-          </a:p>
-          <a:p>
-            <a:pPr marL="274320" indent="-274320">
-              <a:spcAft>
-                <a:spcPts val="990"/>
-              </a:spcAft>
-              <a:buClr>
-                <a:srgbClr val="0645AD"/>
-              </a:buClr>
-              <a:buFont typeface="Arial"/>
-              <a:buChar char="•"/>
-            </a:pPr>
-            <a:r>
-              <a:rPr sz="2200" b="0">
-                <a:solidFill>
-                  <a:srgbClr val="202122"/>
-                </a:solidFill>
-                <a:latin typeface="Calibri"/>
-              </a:rPr>
-              <a:t>Reports</a:t>
-            </a:r>
-          </a:p>
-        </p:txBody>
-      </p:sp>
-      <p:sp>
-        <p:nvSpPr>
-          <p:cNvPr id="10" name="Rounded Rectangle 9"/>
+          <p:cNvPr id="7" name="Oval 6"/>
           <p:cNvSpPr/>
           <p:nvPr/>
         </p:nvSpPr>
         <p:spPr>
           <a:xfrm>
-            <a:off x="6278727" y="1600200"/>
-            <a:ext cx="5364327" cy="640080"/>
-          </a:xfrm>
-          <a:prstGeom prst="roundRect">
-            <a:avLst>
-              <a:gd name="adj" fmla="val 15000"/>
-            </a:avLst>
+            <a:off x="777240" y="1828800"/>
+            <a:ext cx="457200" cy="457200"/>
+          </a:xfrm>
+          <a:prstGeom prst="ellipse">
+            <a:avLst/>
           </a:prstGeom>
           <a:solidFill>
-            <a:srgbClr val="0645AD"/>
+            <a:srgbClr val="E0463A"/>
           </a:solidFill>
           <a:ln>
             <a:noFill/>
@@ -5760,21 +7080,32 @@
           </a:fontRef>
         </p:style>
         <p:txBody>
-          <a:bodyPr rtlCol="0" anchor="ctr"/>
-          <a:lstStyle/>
-          <a:p/>
-        </p:txBody>
-      </p:sp>
-      <p:sp>
-        <p:nvSpPr>
-          <p:cNvPr id="11" name="TextBox 10"/>
+          <a:bodyPr rtlCol="0" anchor="ctr" lIns="0" rIns="0" tIns="0" bIns="0"/>
+          <a:lstStyle/>
+          <a:p>
+            <a:pPr algn="ctr"/>
+            <a:r>
+              <a:rPr sz="1500" b="1">
+                <a:solidFill>
+                  <a:srgbClr val="FFFFFF"/>
+                </a:solidFill>
+                <a:latin typeface="Calibri"/>
+              </a:rPr>
+              <a:t>1</a:t>
+            </a:r>
+          </a:p>
+        </p:txBody>
+      </p:sp>
+      <p:sp>
+        <p:nvSpPr>
+          <p:cNvPr id="8" name="TextBox 7"/>
           <p:cNvSpPr txBox="1"/>
           <p:nvPr/>
         </p:nvSpPr>
         <p:spPr>
           <a:xfrm>
-            <a:off x="6507327" y="1600200"/>
-            <a:ext cx="4907127" cy="640080"/>
+            <a:off x="1371600" y="1801368"/>
+            <a:ext cx="4404207" cy="512064"/>
           </a:xfrm>
           <a:prstGeom prst="rect">
             <a:avLst/>
@@ -5787,31 +7118,64 @@
           <a:p>
             <a:pPr algn="l"/>
             <a:r>
-              <a:rPr sz="2000" b="1" i="0">
-                <a:solidFill>
-                  <a:srgbClr val="FFFFFF"/>
-                </a:solidFill>
-                <a:latin typeface="Calibri"/>
-              </a:rPr>
-              <a:t>Choosing a format</a:t>
-            </a:r>
-          </a:p>
-        </p:txBody>
-      </p:sp>
-      <p:sp>
-        <p:nvSpPr>
-          <p:cNvPr id="12" name="Rounded Rectangle 11"/>
+              <a:rPr sz="1900" b="1" i="0">
+                <a:solidFill>
+                  <a:srgbClr val="03306E"/>
+                </a:solidFill>
+                <a:latin typeface="Calibri"/>
+              </a:rPr>
+              <a:t>Documents</a:t>
+            </a:r>
+          </a:p>
+        </p:txBody>
+      </p:sp>
+      <p:sp>
+        <p:nvSpPr>
+          <p:cNvPr id="9" name="TextBox 8"/>
+          <p:cNvSpPr txBox="1"/>
+          <p:nvPr/>
+        </p:nvSpPr>
+        <p:spPr>
+          <a:xfrm>
+            <a:off x="777240" y="2468880"/>
+            <a:ext cx="4952847" cy="1143000"/>
+          </a:xfrm>
+          <a:prstGeom prst="rect">
+            <a:avLst/>
+          </a:prstGeom>
+          <a:noFill/>
+        </p:spPr>
+        <p:txBody>
+          <a:bodyPr wrap="square" anchor="t" lIns="0" rIns="0" tIns="0" bIns="0"/>
+          <a:lstStyle/>
+          <a:p>
+            <a:pPr algn="l"/>
+            <a:r>
+              <a:rPr sz="2000" b="0" i="0">
+                <a:solidFill>
+                  <a:srgbClr val="202122"/>
+                </a:solidFill>
+                <a:latin typeface="Calibri"/>
+              </a:rPr>
+              <a:t>Design specifications and engineering drawings.</a:t>
+            </a:r>
+          </a:p>
+        </p:txBody>
+      </p:sp>
+      <p:sp>
+        <p:nvSpPr>
+          <p:cNvPr id="10" name="Rounded Rectangle 9"/>
           <p:cNvSpPr/>
           <p:nvPr/>
         </p:nvSpPr>
         <p:spPr>
           <a:xfrm>
-            <a:off x="6278727" y="2377440"/>
-            <a:ext cx="5364327" cy="3794760"/>
+            <a:off x="6233007" y="1600200"/>
+            <a:ext cx="5410047" cy="2148840"/>
           </a:xfrm>
           <a:prstGeom prst="roundRect">
             <a:avLst>
-              <a:gd name="adj" fmla="val 4000"/>
+              <a:gd name="adj" fmla="val 6000"/>
             </a:avLst>
           </a:prstGeom>
           <a:solidFill>
@@ -5844,14 +7208,100 @@
       </p:sp>
       <p:sp>
         <p:nvSpPr>
+          <p:cNvPr id="11" name="Oval 10"/>
+          <p:cNvSpPr/>
+          <p:nvPr/>
+        </p:nvSpPr>
+        <p:spPr>
+          <a:xfrm>
+            <a:off x="6461607" y="1828800"/>
+            <a:ext cx="457200" cy="457200"/>
+          </a:xfrm>
+          <a:prstGeom prst="ellipse">
+            <a:avLst/>
+          </a:prstGeom>
+          <a:solidFill>
+            <a:srgbClr val="E0463A"/>
+          </a:solidFill>
+          <a:ln>
+            <a:noFill/>
+          </a:ln>
+          <a:effectLst/>
+        </p:spPr>
+        <p:style>
+          <a:lnRef idx="1">
+            <a:schemeClr val="accent1"/>
+          </a:lnRef>
+          <a:fillRef idx="3">
+            <a:schemeClr val="accent1"/>
+          </a:fillRef>
+          <a:effectRef idx="2">
+            <a:schemeClr val="accent1"/>
+          </a:effectRef>
+          <a:fontRef idx="minor">
+            <a:schemeClr val="lt1"/>
+          </a:fontRef>
+        </p:style>
+        <p:txBody>
+          <a:bodyPr rtlCol="0" anchor="ctr" lIns="0" rIns="0" tIns="0" bIns="0"/>
+          <a:lstStyle/>
+          <a:p>
+            <a:pPr algn="ctr"/>
+            <a:r>
+              <a:rPr sz="1500" b="1">
+                <a:solidFill>
+                  <a:srgbClr val="FFFFFF"/>
+                </a:solidFill>
+                <a:latin typeface="Calibri"/>
+              </a:rPr>
+              <a:t>2</a:t>
+            </a:r>
+          </a:p>
+        </p:txBody>
+      </p:sp>
+      <p:sp>
+        <p:nvSpPr>
+          <p:cNvPr id="12" name="TextBox 11"/>
+          <p:cNvSpPr txBox="1"/>
+          <p:nvPr/>
+        </p:nvSpPr>
+        <p:spPr>
+          <a:xfrm>
+            <a:off x="7055967" y="1801368"/>
+            <a:ext cx="4404207" cy="512064"/>
+          </a:xfrm>
+          <a:prstGeom prst="rect">
+            <a:avLst/>
+          </a:prstGeom>
+          <a:noFill/>
+        </p:spPr>
+        <p:txBody>
+          <a:bodyPr wrap="square" anchor="ctr" lIns="0" rIns="0" tIns="0" bIns="0"/>
+          <a:lstStyle/>
+          <a:p>
+            <a:pPr algn="l"/>
+            <a:r>
+              <a:rPr sz="1900" b="1" i="0">
+                <a:solidFill>
+                  <a:srgbClr val="03306E"/>
+                </a:solidFill>
+                <a:latin typeface="Calibri"/>
+              </a:rPr>
+              <a:t>Digital tools</a:t>
+            </a:r>
+          </a:p>
+        </p:txBody>
+      </p:sp>
+      <p:sp>
+        <p:nvSpPr>
           <p:cNvPr id="13" name="TextBox 12"/>
           <p:cNvSpPr txBox="1"/>
           <p:nvPr/>
         </p:nvSpPr>
         <p:spPr>
           <a:xfrm>
-            <a:off x="6553047" y="2606040"/>
-            <a:ext cx="4815687" cy="3337560"/>
+            <a:off x="6461607" y="2468880"/>
+            <a:ext cx="4952847" cy="1143000"/>
           </a:xfrm>
           <a:prstGeom prst="rect">
             <a:avLst/>
@@ -5859,92 +7309,344 @@
           <a:noFill/>
         </p:spPr>
         <p:txBody>
-          <a:bodyPr wrap="square" lIns="0" rIns="0" tIns="0" bIns="0">
-            <a:spAutoFit/>
-          </a:bodyPr>
-          <a:lstStyle/>
-          <a:p>
-            <a:pPr marL="274320" indent="-274320">
-              <a:spcAft>
-                <a:spcPts val="990"/>
-              </a:spcAft>
-              <a:buClr>
-                <a:srgbClr val="0645AD"/>
-              </a:buClr>
-              <a:buFont typeface="Arial"/>
-              <a:buChar char="•"/>
-            </a:pPr>
-            <a:r>
-              <a:rPr sz="2200" b="0">
+          <a:bodyPr wrap="square" anchor="t" lIns="0" rIns="0" tIns="0" bIns="0"/>
+          <a:lstStyle/>
+          <a:p>
+            <a:pPr algn="l"/>
+            <a:r>
+              <a:rPr sz="2000" b="0" i="0">
                 <a:solidFill>
                   <a:srgbClr val="202122"/>
                 </a:solidFill>
                 <a:latin typeface="Calibri"/>
               </a:rPr>
-              <a:t>Cost and time</a:t>
-            </a:r>
-          </a:p>
-          <a:p>
-            <a:pPr marL="274320" indent="-274320">
-              <a:spcAft>
-                <a:spcPts val="990"/>
-              </a:spcAft>
-              <a:buClr>
-                <a:srgbClr val="0645AD"/>
-              </a:buClr>
-              <a:buFont typeface="Arial"/>
-              <a:buChar char="•"/>
-            </a:pPr>
-            <a:r>
-              <a:rPr sz="2200" b="0">
+              <a:t>CAD, document management systems, SharePoint, spreadsheets.</a:t>
+            </a:r>
+          </a:p>
+        </p:txBody>
+      </p:sp>
+      <p:sp>
+        <p:nvSpPr>
+          <p:cNvPr id="14" name="Rounded Rectangle 13"/>
+          <p:cNvSpPr/>
+          <p:nvPr/>
+        </p:nvSpPr>
+        <p:spPr>
+          <a:xfrm>
+            <a:off x="548640" y="4023360"/>
+            <a:ext cx="5410047" cy="2148840"/>
+          </a:xfrm>
+          <a:prstGeom prst="roundRect">
+            <a:avLst>
+              <a:gd name="adj" fmla="val 6000"/>
+            </a:avLst>
+          </a:prstGeom>
+          <a:solidFill>
+            <a:srgbClr val="EAF3FF"/>
+          </a:solidFill>
+          <a:ln>
+            <a:noFill/>
+          </a:ln>
+          <a:effectLst/>
+        </p:spPr>
+        <p:style>
+          <a:lnRef idx="1">
+            <a:schemeClr val="accent1"/>
+          </a:lnRef>
+          <a:fillRef idx="3">
+            <a:schemeClr val="accent1"/>
+          </a:fillRef>
+          <a:effectRef idx="2">
+            <a:schemeClr val="accent1"/>
+          </a:effectRef>
+          <a:fontRef idx="minor">
+            <a:schemeClr val="lt1"/>
+          </a:fontRef>
+        </p:style>
+        <p:txBody>
+          <a:bodyPr rtlCol="0" anchor="ctr"/>
+          <a:lstStyle/>
+          <a:p/>
+        </p:txBody>
+      </p:sp>
+      <p:sp>
+        <p:nvSpPr>
+          <p:cNvPr id="15" name="Oval 14"/>
+          <p:cNvSpPr/>
+          <p:nvPr/>
+        </p:nvSpPr>
+        <p:spPr>
+          <a:xfrm>
+            <a:off x="777240" y="4251960"/>
+            <a:ext cx="457200" cy="457200"/>
+          </a:xfrm>
+          <a:prstGeom prst="ellipse">
+            <a:avLst/>
+          </a:prstGeom>
+          <a:solidFill>
+            <a:srgbClr val="E0463A"/>
+          </a:solidFill>
+          <a:ln>
+            <a:noFill/>
+          </a:ln>
+          <a:effectLst/>
+        </p:spPr>
+        <p:style>
+          <a:lnRef idx="1">
+            <a:schemeClr val="accent1"/>
+          </a:lnRef>
+          <a:fillRef idx="3">
+            <a:schemeClr val="accent1"/>
+          </a:fillRef>
+          <a:effectRef idx="2">
+            <a:schemeClr val="accent1"/>
+          </a:effectRef>
+          <a:fontRef idx="minor">
+            <a:schemeClr val="lt1"/>
+          </a:fontRef>
+        </p:style>
+        <p:txBody>
+          <a:bodyPr rtlCol="0" anchor="ctr" lIns="0" rIns="0" tIns="0" bIns="0"/>
+          <a:lstStyle/>
+          <a:p>
+            <a:pPr algn="ctr"/>
+            <a:r>
+              <a:rPr sz="1500" b="1">
+                <a:solidFill>
+                  <a:srgbClr val="FFFFFF"/>
+                </a:solidFill>
+                <a:latin typeface="Calibri"/>
+              </a:rPr>
+              <a:t>3</a:t>
+            </a:r>
+          </a:p>
+        </p:txBody>
+      </p:sp>
+      <p:sp>
+        <p:nvSpPr>
+          <p:cNvPr id="16" name="TextBox 15"/>
+          <p:cNvSpPr txBox="1"/>
+          <p:nvPr/>
+        </p:nvSpPr>
+        <p:spPr>
+          <a:xfrm>
+            <a:off x="1371600" y="4224528"/>
+            <a:ext cx="4404207" cy="512064"/>
+          </a:xfrm>
+          <a:prstGeom prst="rect">
+            <a:avLst/>
+          </a:prstGeom>
+          <a:noFill/>
+        </p:spPr>
+        <p:txBody>
+          <a:bodyPr wrap="square" anchor="ctr" lIns="0" rIns="0" tIns="0" bIns="0"/>
+          <a:lstStyle/>
+          <a:p>
+            <a:pPr algn="l"/>
+            <a:r>
+              <a:rPr sz="1900" b="1" i="0">
+                <a:solidFill>
+                  <a:srgbClr val="03306E"/>
+                </a:solidFill>
+                <a:latin typeface="Calibri"/>
+              </a:rPr>
+              <a:t>Version control</a:t>
+            </a:r>
+          </a:p>
+        </p:txBody>
+      </p:sp>
+      <p:sp>
+        <p:nvSpPr>
+          <p:cNvPr id="17" name="TextBox 16"/>
+          <p:cNvSpPr txBox="1"/>
+          <p:nvPr/>
+        </p:nvSpPr>
+        <p:spPr>
+          <a:xfrm>
+            <a:off x="777240" y="4892040"/>
+            <a:ext cx="4952847" cy="1143000"/>
+          </a:xfrm>
+          <a:prstGeom prst="rect">
+            <a:avLst/>
+          </a:prstGeom>
+          <a:noFill/>
+        </p:spPr>
+        <p:txBody>
+          <a:bodyPr wrap="square" anchor="t" lIns="0" rIns="0" tIns="0" bIns="0"/>
+          <a:lstStyle/>
+          <a:p>
+            <a:pPr algn="l"/>
+            <a:r>
+              <a:rPr sz="2000" b="0" i="0">
                 <a:solidFill>
                   <a:srgbClr val="202122"/>
                 </a:solidFill>
                 <a:latin typeface="Calibri"/>
               </a:rPr>
-              <a:t>Availability</a:t>
-            </a:r>
-          </a:p>
-          <a:p>
-            <a:pPr marL="274320" indent="-274320">
-              <a:spcAft>
-                <a:spcPts val="990"/>
-              </a:spcAft>
-              <a:buClr>
-                <a:srgbClr val="0645AD"/>
-              </a:buClr>
-              <a:buFont typeface="Arial"/>
-              <a:buChar char="•"/>
-            </a:pPr>
-            <a:r>
-              <a:rPr sz="2200" b="0">
+              <a:t>Revision letters, change notes, one current version.</a:t>
+            </a:r>
+          </a:p>
+        </p:txBody>
+      </p:sp>
+      <p:sp>
+        <p:nvSpPr>
+          <p:cNvPr id="18" name="Rounded Rectangle 17"/>
+          <p:cNvSpPr/>
+          <p:nvPr/>
+        </p:nvSpPr>
+        <p:spPr>
+          <a:xfrm>
+            <a:off x="6233007" y="4023360"/>
+            <a:ext cx="5410047" cy="2148840"/>
+          </a:xfrm>
+          <a:prstGeom prst="roundRect">
+            <a:avLst>
+              <a:gd name="adj" fmla="val 6000"/>
+            </a:avLst>
+          </a:prstGeom>
+          <a:solidFill>
+            <a:srgbClr val="EAF3FF"/>
+          </a:solidFill>
+          <a:ln>
+            <a:noFill/>
+          </a:ln>
+          <a:effectLst/>
+        </p:spPr>
+        <p:style>
+          <a:lnRef idx="1">
+            <a:schemeClr val="accent1"/>
+          </a:lnRef>
+          <a:fillRef idx="3">
+            <a:schemeClr val="accent1"/>
+          </a:fillRef>
+          <a:effectRef idx="2">
+            <a:schemeClr val="accent1"/>
+          </a:effectRef>
+          <a:fontRef idx="minor">
+            <a:schemeClr val="lt1"/>
+          </a:fontRef>
+        </p:style>
+        <p:txBody>
+          <a:bodyPr rtlCol="0" anchor="ctr"/>
+          <a:lstStyle/>
+          <a:p/>
+        </p:txBody>
+      </p:sp>
+      <p:sp>
+        <p:nvSpPr>
+          <p:cNvPr id="19" name="Oval 18"/>
+          <p:cNvSpPr/>
+          <p:nvPr/>
+        </p:nvSpPr>
+        <p:spPr>
+          <a:xfrm>
+            <a:off x="6461607" y="4251960"/>
+            <a:ext cx="457200" cy="457200"/>
+          </a:xfrm>
+          <a:prstGeom prst="ellipse">
+            <a:avLst/>
+          </a:prstGeom>
+          <a:solidFill>
+            <a:srgbClr val="E0463A"/>
+          </a:solidFill>
+          <a:ln>
+            <a:noFill/>
+          </a:ln>
+          <a:effectLst/>
+        </p:spPr>
+        <p:style>
+          <a:lnRef idx="1">
+            <a:schemeClr val="accent1"/>
+          </a:lnRef>
+          <a:fillRef idx="3">
+            <a:schemeClr val="accent1"/>
+          </a:fillRef>
+          <a:effectRef idx="2">
+            <a:schemeClr val="accent1"/>
+          </a:effectRef>
+          <a:fontRef idx="minor">
+            <a:schemeClr val="lt1"/>
+          </a:fontRef>
+        </p:style>
+        <p:txBody>
+          <a:bodyPr rtlCol="0" anchor="ctr" lIns="0" rIns="0" tIns="0" bIns="0"/>
+          <a:lstStyle/>
+          <a:p>
+            <a:pPr algn="ctr"/>
+            <a:r>
+              <a:rPr sz="1500" b="1">
+                <a:solidFill>
+                  <a:srgbClr val="FFFFFF"/>
+                </a:solidFill>
+                <a:latin typeface="Calibri"/>
+              </a:rPr>
+              <a:t>4</a:t>
+            </a:r>
+          </a:p>
+        </p:txBody>
+      </p:sp>
+      <p:sp>
+        <p:nvSpPr>
+          <p:cNvPr id="20" name="TextBox 19"/>
+          <p:cNvSpPr txBox="1"/>
+          <p:nvPr/>
+        </p:nvSpPr>
+        <p:spPr>
+          <a:xfrm>
+            <a:off x="7055967" y="4224528"/>
+            <a:ext cx="4404207" cy="512064"/>
+          </a:xfrm>
+          <a:prstGeom prst="rect">
+            <a:avLst/>
+          </a:prstGeom>
+          <a:noFill/>
+        </p:spPr>
+        <p:txBody>
+          <a:bodyPr wrap="square" anchor="ctr" lIns="0" rIns="0" tIns="0" bIns="0"/>
+          <a:lstStyle/>
+          <a:p>
+            <a:pPr algn="l"/>
+            <a:r>
+              <a:rPr sz="1900" b="1" i="0">
+                <a:solidFill>
+                  <a:srgbClr val="03306E"/>
+                </a:solidFill>
+                <a:latin typeface="Calibri"/>
+              </a:rPr>
+              <a:t>Annotation</a:t>
+            </a:r>
+          </a:p>
+        </p:txBody>
+      </p:sp>
+      <p:sp>
+        <p:nvSpPr>
+          <p:cNvPr id="21" name="TextBox 20"/>
+          <p:cNvSpPr txBox="1"/>
+          <p:nvPr/>
+        </p:nvSpPr>
+        <p:spPr>
+          <a:xfrm>
+            <a:off x="6461607" y="4892040"/>
+            <a:ext cx="4952847" cy="1143000"/>
+          </a:xfrm>
+          <a:prstGeom prst="rect">
+            <a:avLst/>
+          </a:prstGeom>
+          <a:noFill/>
+        </p:spPr>
+        <p:txBody>
+          <a:bodyPr wrap="square" anchor="t" lIns="0" rIns="0" tIns="0" bIns="0"/>
+          <a:lstStyle/>
+          <a:p>
+            <a:pPr algn="l"/>
+            <a:r>
+              <a:rPr sz="2000" b="0" i="0">
                 <a:solidFill>
                   <a:srgbClr val="202122"/>
                 </a:solidFill>
                 <a:latin typeface="Calibri"/>
               </a:rPr>
-              <a:t>The end user</a:t>
-            </a:r>
-          </a:p>
-          <a:p>
-            <a:pPr marL="274320" indent="-274320">
-              <a:spcAft>
-                <a:spcPts val="990"/>
-              </a:spcAft>
-              <a:buClr>
-                <a:srgbClr val="0645AD"/>
-              </a:buClr>
-              <a:buFont typeface="Arial"/>
-              <a:buChar char="•"/>
-            </a:pPr>
-            <a:r>
-              <a:rPr sz="2200" b="0">
-                <a:solidFill>
-                  <a:srgbClr val="202122"/>
-                </a:solidFill>
-                <a:latin typeface="Calibri"/>
-              </a:rPr>
-              <a:t>The scale of the project</a:t>
+              <a:t>Geometrical tolerances, limits and fits, surface finishes.</a:t>
             </a:r>
           </a:p>
         </p:txBody>
@@ -6036,7 +7738,7 @@
                 </a:solidFill>
                 <a:latin typeface="Cambria"/>
               </a:rPr>
-              <a:t>Check your understanding</a:t>
+              <a:t>Quick check: Managing documentation</a:t>
             </a:r>
           </a:p>
         </p:txBody>
@@ -6115,8 +7817,8 @@
         </p:nvSpPr>
         <p:spPr>
           <a:xfrm>
-            <a:off x="548640" y="1618488"/>
-            <a:ext cx="411480" cy="411480"/>
+            <a:off x="548640" y="1691640"/>
+            <a:ext cx="502920" cy="502920"/>
           </a:xfrm>
           <a:prstGeom prst="ellipse">
             <a:avLst/>
@@ -6149,7 +7851,7 @@
           <a:p>
             <a:pPr algn="ctr"/>
             <a:r>
-              <a:rPr sz="1400" b="1">
+              <a:rPr sz="1600" b="1">
                 <a:solidFill>
                   <a:srgbClr val="FFFFFF"/>
                 </a:solidFill>
@@ -6168,8 +7870,8 @@
         </p:nvSpPr>
         <p:spPr>
           <a:xfrm>
-            <a:off x="1234440" y="1600200"/>
-            <a:ext cx="10408615" cy="1429512"/>
+            <a:off x="1371600" y="1645920"/>
+            <a:ext cx="10271455" cy="1188720"/>
           </a:xfrm>
           <a:prstGeom prst="rect">
             <a:avLst/>
@@ -6182,13 +7884,13 @@
           <a:p>
             <a:pPr algn="l"/>
             <a:r>
-              <a:rPr sz="2200" b="0" i="0">
+              <a:rPr sz="2400" b="0" i="0">
                 <a:solidFill>
                   <a:srgbClr val="202122"/>
                 </a:solidFill>
                 <a:latin typeface="Calibri"/>
               </a:rPr>
-              <a:t>Why use revision letters on drawings?</a:t>
+              <a:t>What is a revision letter for?</a:t>
             </a:r>
           </a:p>
         </p:txBody>
@@ -6201,8 +7903,8 @@
         </p:nvSpPr>
         <p:spPr>
           <a:xfrm>
-            <a:off x="548640" y="3212592"/>
-            <a:ext cx="411480" cy="411480"/>
+            <a:off x="548640" y="3108960"/>
+            <a:ext cx="502920" cy="502920"/>
           </a:xfrm>
           <a:prstGeom prst="ellipse">
             <a:avLst/>
@@ -6235,7 +7937,7 @@
           <a:p>
             <a:pPr algn="ctr"/>
             <a:r>
-              <a:rPr sz="1400" b="1">
+              <a:rPr sz="1600" b="1">
                 <a:solidFill>
                   <a:srgbClr val="FFFFFF"/>
                 </a:solidFill>
@@ -6254,8 +7956,8 @@
         </p:nvSpPr>
         <p:spPr>
           <a:xfrm>
-            <a:off x="1234440" y="3194304"/>
-            <a:ext cx="10408615" cy="1429512"/>
+            <a:off x="1371600" y="3063240"/>
+            <a:ext cx="10271455" cy="1188720"/>
           </a:xfrm>
           <a:prstGeom prst="rect">
             <a:avLst/>
@@ -6268,13 +7970,13 @@
           <a:p>
             <a:pPr algn="l"/>
             <a:r>
-              <a:rPr sz="2200" b="0" i="0">
+              <a:rPr sz="2400" b="0" i="0">
                 <a:solidFill>
                   <a:srgbClr val="202122"/>
                 </a:solidFill>
                 <a:latin typeface="Calibri"/>
               </a:rPr>
-              <a:t>Name two digital tools for managing documentation.</a:t>
+              <a:t>Name two digital tools for managing documents.</a:t>
             </a:r>
           </a:p>
         </p:txBody>
@@ -6287,8 +7989,8 @@
         </p:nvSpPr>
         <p:spPr>
           <a:xfrm>
-            <a:off x="548640" y="4806695"/>
-            <a:ext cx="411480" cy="411480"/>
+            <a:off x="548640" y="4526280"/>
+            <a:ext cx="502920" cy="502920"/>
           </a:xfrm>
           <a:prstGeom prst="ellipse">
             <a:avLst/>
@@ -6321,7 +8023,7 @@
           <a:p>
             <a:pPr algn="ctr"/>
             <a:r>
-              <a:rPr sz="1400" b="1">
+              <a:rPr sz="1600" b="1">
                 <a:solidFill>
                   <a:srgbClr val="FFFFFF"/>
                 </a:solidFill>
@@ -6340,8 +8042,8 @@
         </p:nvSpPr>
         <p:spPr>
           <a:xfrm>
-            <a:off x="1234440" y="4788408"/>
-            <a:ext cx="10408615" cy="1429512"/>
+            <a:off x="1371600" y="4480560"/>
+            <a:ext cx="10271455" cy="1188720"/>
           </a:xfrm>
           <a:prstGeom prst="rect">
             <a:avLst/>
@@ -6354,13 +8056,46 @@
           <a:p>
             <a:pPr algn="l"/>
             <a:r>
-              <a:rPr sz="2200" b="0" i="0">
+              <a:rPr sz="2400" b="0" i="0">
                 <a:solidFill>
                   <a:srgbClr val="202122"/>
                 </a:solidFill>
                 <a:latin typeface="Calibri"/>
               </a:rPr>
-              <a:t>Which format suits a non-technical client?</a:t>
+              <a:t>What is a surface finish annotation for?</a:t>
+            </a:r>
+          </a:p>
+        </p:txBody>
+      </p:sp>
+      <p:sp>
+        <p:nvSpPr>
+          <p:cNvPr id="12" name="TextBox 11"/>
+          <p:cNvSpPr txBox="1"/>
+          <p:nvPr/>
+        </p:nvSpPr>
+        <p:spPr>
+          <a:xfrm>
+            <a:off x="548640" y="5852160"/>
+            <a:ext cx="11094415" cy="365760"/>
+          </a:xfrm>
+          <a:prstGeom prst="rect">
+            <a:avLst/>
+          </a:prstGeom>
+          <a:noFill/>
+        </p:spPr>
+        <p:txBody>
+          <a:bodyPr wrap="square" anchor="t" lIns="0" rIns="0" tIns="0" bIns="0"/>
+          <a:lstStyle/>
+          <a:p>
+            <a:pPr algn="l"/>
+            <a:r>
+              <a:rPr sz="1300" b="0" i="1">
+                <a:solidFill>
+                  <a:srgbClr val="54595D"/>
+                </a:solidFill>
+                <a:latin typeface="Calibri"/>
+              </a:rPr>
+              <a:t>Answer on mini whiteboards or in your book. Answers are in the speaker notes.</a:t>
             </a:r>
           </a:p>
         </p:txBody>
@@ -6452,7 +8187,7 @@
                 </a:solidFill>
                 <a:latin typeface="Cambria"/>
               </a:rPr>
-              <a:t>Answers</a:t>
+              <a:t>Communicating design information</a:t>
             </a:r>
           </a:p>
         </p:txBody>
@@ -6525,14 +8260,129 @@
       </p:sp>
       <p:sp>
         <p:nvSpPr>
-          <p:cNvPr id="6" name="Oval 5"/>
+          <p:cNvPr id="6" name="TextBox 5"/>
+          <p:cNvSpPr txBox="1"/>
+          <p:nvPr/>
+        </p:nvSpPr>
+        <p:spPr>
+          <a:xfrm>
+            <a:off x="548640" y="1554480"/>
+            <a:ext cx="6720840" cy="4617720"/>
+          </a:xfrm>
+          <a:prstGeom prst="rect">
+            <a:avLst/>
+          </a:prstGeom>
+          <a:noFill/>
+        </p:spPr>
+        <p:txBody>
+          <a:bodyPr wrap="square" lIns="0" rIns="0" tIns="0" bIns="0">
+            <a:spAutoFit/>
+          </a:bodyPr>
+          <a:lstStyle/>
+          <a:p>
+            <a:pPr>
+              <a:spcAft>
+                <a:spcPts val="1320"/>
+              </a:spcAft>
+            </a:pPr>
+            <a:r>
+              <a:rPr sz="2200" b="0">
+                <a:solidFill>
+                  <a:srgbClr val="202122"/>
+                </a:solidFill>
+                <a:latin typeface="Calibri"/>
+              </a:rPr>
+              <a:t>Design information includes specifications, proposals, working drawings, representations, data, processes, risks and outcomes.</a:t>
+            </a:r>
+          </a:p>
+          <a:p>
+            <a:pPr>
+              <a:spcAft>
+                <a:spcPts val="1320"/>
+              </a:spcAft>
+            </a:pPr>
+            <a:r>
+              <a:rPr sz="2200" b="0">
+                <a:solidFill>
+                  <a:srgbClr val="202122"/>
+                </a:solidFill>
+                <a:latin typeface="Calibri"/>
+              </a:rPr>
+              <a:t>It's shared with stakeholders, colleagues and clients using sketches, schemes, detailed drawings, diagrams, models and reports.</a:t>
+            </a:r>
+          </a:p>
+          <a:p>
+            <a:pPr>
+              <a:spcAft>
+                <a:spcPts val="1320"/>
+              </a:spcAft>
+            </a:pPr>
+            <a:r>
+              <a:rPr sz="2200" b="0">
+                <a:solidFill>
+                  <a:srgbClr val="202122"/>
+                </a:solidFill>
+                <a:latin typeface="Calibri"/>
+              </a:rPr>
+              <a:t>Choose the format by cost, time, availability, the end user and the scale of the project, and make each stage of the design process clear.</a:t>
+            </a:r>
+          </a:p>
+        </p:txBody>
+      </p:sp>
+      <p:sp>
+        <p:nvSpPr>
+          <p:cNvPr id="7" name="Rounded Rectangle 6"/>
           <p:cNvSpPr/>
           <p:nvPr/>
         </p:nvSpPr>
         <p:spPr>
           <a:xfrm>
-            <a:off x="548640" y="1618488"/>
-            <a:ext cx="411480" cy="411480"/>
+            <a:off x="7772400" y="1554480"/>
+            <a:ext cx="3867912" cy="4526280"/>
+          </a:xfrm>
+          <a:prstGeom prst="roundRect">
+            <a:avLst>
+              <a:gd name="adj" fmla="val 8000"/>
+            </a:avLst>
+          </a:prstGeom>
+          <a:solidFill>
+            <a:srgbClr val="03306E"/>
+          </a:solidFill>
+          <a:ln>
+            <a:noFill/>
+          </a:ln>
+          <a:effectLst/>
+        </p:spPr>
+        <p:style>
+          <a:lnRef idx="1">
+            <a:schemeClr val="accent1"/>
+          </a:lnRef>
+          <a:fillRef idx="3">
+            <a:schemeClr val="accent1"/>
+          </a:fillRef>
+          <a:effectRef idx="2">
+            <a:schemeClr val="accent1"/>
+          </a:effectRef>
+          <a:fontRef idx="minor">
+            <a:schemeClr val="lt1"/>
+          </a:fontRef>
+        </p:style>
+        <p:txBody>
+          <a:bodyPr rtlCol="0" anchor="ctr"/>
+          <a:lstStyle/>
+          <a:p/>
+        </p:txBody>
+      </p:sp>
+      <p:sp>
+        <p:nvSpPr>
+          <p:cNvPr id="8" name="Oval 7"/>
+          <p:cNvSpPr/>
+          <p:nvPr/>
+        </p:nvSpPr>
+        <p:spPr>
+          <a:xfrm>
+            <a:off x="8046720" y="1828800"/>
+            <a:ext cx="548640" cy="548640"/>
           </a:xfrm>
           <a:prstGeom prst="ellipse">
             <a:avLst/>
@@ -6565,110 +8415,13 @@
           <a:p>
             <a:pPr algn="ctr"/>
             <a:r>
-              <a:rPr sz="1400" b="1">
+              <a:rPr sz="1300" b="1">
                 <a:solidFill>
                   <a:srgbClr val="FFFFFF"/>
                 </a:solidFill>
                 <a:latin typeface="Calibri"/>
               </a:rPr>
-              <a:t>1</a:t>
-            </a:r>
-          </a:p>
-        </p:txBody>
-      </p:sp>
-      <p:sp>
-        <p:nvSpPr>
-          <p:cNvPr id="7" name="TextBox 6"/>
-          <p:cNvSpPr txBox="1"/>
-          <p:nvPr/>
-        </p:nvSpPr>
-        <p:spPr>
-          <a:xfrm>
-            <a:off x="1234440" y="1600200"/>
-            <a:ext cx="10408615" cy="1429512"/>
-          </a:xfrm>
-          <a:prstGeom prst="rect">
-            <a:avLst/>
-          </a:prstGeom>
-          <a:noFill/>
-        </p:spPr>
-        <p:txBody>
-          <a:bodyPr wrap="square" anchor="t" lIns="0" rIns="0" tIns="0" bIns="0"/>
-          <a:lstStyle/>
-          <a:p>
-            <a:pPr algn="l"/>
-            <a:r>
-              <a:rPr sz="1800" b="0" i="0">
-                <a:solidFill>
-                  <a:srgbClr val="54595D"/>
-                </a:solidFill>
-                <a:latin typeface="Calibri"/>
-              </a:rPr>
-              <a:t>Why use revision letters on drawings?</a:t>
-            </a:r>
-          </a:p>
-          <a:p>
-            <a:r>
-              <a:rPr sz="1800" b="1">
-                <a:solidFill>
-                  <a:srgbClr val="03306E"/>
-                </a:solidFill>
-                <a:latin typeface="Calibri"/>
-              </a:rPr>
-              <a:t>To show which version is current and track changes.</a:t>
-            </a:r>
-          </a:p>
-        </p:txBody>
-      </p:sp>
-      <p:sp>
-        <p:nvSpPr>
-          <p:cNvPr id="8" name="Oval 7"/>
-          <p:cNvSpPr/>
-          <p:nvPr/>
-        </p:nvSpPr>
-        <p:spPr>
-          <a:xfrm>
-            <a:off x="548640" y="3212592"/>
-            <a:ext cx="411480" cy="411480"/>
-          </a:xfrm>
-          <a:prstGeom prst="ellipse">
-            <a:avLst/>
-          </a:prstGeom>
-          <a:solidFill>
-            <a:srgbClr val="E0463A"/>
-          </a:solidFill>
-          <a:ln>
-            <a:noFill/>
-          </a:ln>
-          <a:effectLst/>
-        </p:spPr>
-        <p:style>
-          <a:lnRef idx="1">
-            <a:schemeClr val="accent1"/>
-          </a:lnRef>
-          <a:fillRef idx="3">
-            <a:schemeClr val="accent1"/>
-          </a:fillRef>
-          <a:effectRef idx="2">
-            <a:schemeClr val="accent1"/>
-          </a:effectRef>
-          <a:fontRef idx="minor">
-            <a:schemeClr val="lt1"/>
-          </a:fontRef>
-        </p:style>
-        <p:txBody>
-          <a:bodyPr rtlCol="0" anchor="ctr" lIns="0" rIns="0" tIns="0" bIns="0"/>
-          <a:lstStyle/>
-          <a:p>
-            <a:pPr algn="ctr"/>
-            <a:r>
-              <a:rPr sz="1400" b="1">
-                <a:solidFill>
-                  <a:srgbClr val="FFFFFF"/>
-                </a:solidFill>
-                <a:latin typeface="Calibri"/>
-              </a:rPr>
-              <a:t>2</a:t>
+              <a:t>e.g.</a:t>
             </a:r>
           </a:p>
         </p:txBody>
@@ -6681,8 +8434,8 @@
         </p:nvSpPr>
         <p:spPr>
           <a:xfrm>
-            <a:off x="1234440" y="3194304"/>
-            <a:ext cx="10408615" cy="1429512"/>
+            <a:off x="8046720" y="2560320"/>
+            <a:ext cx="3291840" cy="365760"/>
           </a:xfrm>
           <a:prstGeom prst="rect">
             <a:avLst/>
@@ -6695,121 +8448,46 @@
           <a:p>
             <a:pPr algn="l"/>
             <a:r>
-              <a:rPr sz="1800" b="0" i="0">
-                <a:solidFill>
-                  <a:srgbClr val="54595D"/>
-                </a:solidFill>
-                <a:latin typeface="Calibri"/>
-              </a:rPr>
-              <a:t>Name two digital tools for managing documentation.</a:t>
-            </a:r>
-          </a:p>
-          <a:p>
-            <a:r>
-              <a:rPr sz="1800" b="1">
-                <a:solidFill>
-                  <a:srgbClr val="03306E"/>
-                </a:solidFill>
-                <a:latin typeface="Calibri"/>
-              </a:rPr>
-              <a:t>Any two of: CAD, document management systems, SharePoint, spreadsheets.</a:t>
-            </a:r>
-          </a:p>
-        </p:txBody>
-      </p:sp>
-      <p:sp>
-        <p:nvSpPr>
-          <p:cNvPr id="10" name="Oval 9"/>
-          <p:cNvSpPr/>
-          <p:nvPr/>
-        </p:nvSpPr>
-        <p:spPr>
-          <a:xfrm>
-            <a:off x="548640" y="4806695"/>
-            <a:ext cx="411480" cy="411480"/>
-          </a:xfrm>
-          <a:prstGeom prst="ellipse">
-            <a:avLst/>
-          </a:prstGeom>
-          <a:solidFill>
-            <a:srgbClr val="E0463A"/>
-          </a:solidFill>
-          <a:ln>
-            <a:noFill/>
-          </a:ln>
-          <a:effectLst/>
-        </p:spPr>
-        <p:style>
-          <a:lnRef idx="1">
-            <a:schemeClr val="accent1"/>
-          </a:lnRef>
-          <a:fillRef idx="3">
-            <a:schemeClr val="accent1"/>
-          </a:fillRef>
-          <a:effectRef idx="2">
-            <a:schemeClr val="accent1"/>
-          </a:effectRef>
-          <a:fontRef idx="minor">
-            <a:schemeClr val="lt1"/>
-          </a:fontRef>
-        </p:style>
-        <p:txBody>
-          <a:bodyPr rtlCol="0" anchor="ctr" lIns="0" rIns="0" tIns="0" bIns="0"/>
-          <a:lstStyle/>
-          <a:p>
-            <a:pPr algn="ctr"/>
-            <a:r>
-              <a:rPr sz="1400" b="1">
+              <a:rPr sz="1300" b="1" i="0">
+                <a:solidFill>
+                  <a:srgbClr val="A9C8F0"/>
+                </a:solidFill>
+                <a:latin typeface="Calibri"/>
+              </a:rPr>
+              <a:t>EXAMPLE</a:t>
+            </a:r>
+          </a:p>
+        </p:txBody>
+      </p:sp>
+      <p:sp>
+        <p:nvSpPr>
+          <p:cNvPr id="10" name="TextBox 9"/>
+          <p:cNvSpPr txBox="1"/>
+          <p:nvPr/>
+        </p:nvSpPr>
+        <p:spPr>
+          <a:xfrm>
+            <a:off x="8046720" y="2971800"/>
+            <a:ext cx="3291840" cy="2971800"/>
+          </a:xfrm>
+          <a:prstGeom prst="rect">
+            <a:avLst/>
+          </a:prstGeom>
+          <a:noFill/>
+        </p:spPr>
+        <p:txBody>
+          <a:bodyPr wrap="square" anchor="t" lIns="0" rIns="0" tIns="0" bIns="0"/>
+          <a:lstStyle/>
+          <a:p>
+            <a:pPr algn="l"/>
+            <a:r>
+              <a:rPr sz="1900" b="0" i="0">
                 <a:solidFill>
                   <a:srgbClr val="FFFFFF"/>
                 </a:solidFill>
-                <a:latin typeface="Calibri"/>
-              </a:rPr>
-              <a:t>3</a:t>
-            </a:r>
-          </a:p>
-        </p:txBody>
-      </p:sp>
-      <p:sp>
-        <p:nvSpPr>
-          <p:cNvPr id="11" name="TextBox 10"/>
-          <p:cNvSpPr txBox="1"/>
-          <p:nvPr/>
-        </p:nvSpPr>
-        <p:spPr>
-          <a:xfrm>
-            <a:off x="1234440" y="4788408"/>
-            <a:ext cx="10408615" cy="1429512"/>
-          </a:xfrm>
-          <a:prstGeom prst="rect">
-            <a:avLst/>
-          </a:prstGeom>
-          <a:noFill/>
-        </p:spPr>
-        <p:txBody>
-          <a:bodyPr wrap="square" anchor="t" lIns="0" rIns="0" tIns="0" bIns="0"/>
-          <a:lstStyle/>
-          <a:p>
-            <a:pPr algn="l"/>
-            <a:r>
-              <a:rPr sz="1800" b="0" i="0">
-                <a:solidFill>
-                  <a:srgbClr val="54595D"/>
-                </a:solidFill>
-                <a:latin typeface="Calibri"/>
-              </a:rPr>
-              <a:t>Which format suits a non-technical client?</a:t>
-            </a:r>
-          </a:p>
-          <a:p>
-            <a:r>
-              <a:rPr sz="1800" b="1">
-                <a:solidFill>
-                  <a:srgbClr val="03306E"/>
-                </a:solidFill>
-                <a:latin typeface="Calibri"/>
-              </a:rPr>
-              <a:t>E.g. a rendered model, sketch or plain-language report.</a:t>
+                <a:latin typeface="Cambria"/>
+              </a:rPr>
+              <a:t>A client meeting uses a 3D-printed model and a rendering; the workshop gets detailed drawings; the board gets a two-page report.</a:t>
             </a:r>
           </a:p>
         </p:txBody>
@@ -6901,7 +8579,7 @@
                 </a:solidFill>
                 <a:latin typeface="Cambria"/>
               </a:rPr>
-              <a:t>Activity: Document pack</a:t>
+              <a:t>Communicating design information</a:t>
             </a:r>
           </a:p>
         </p:txBody>
@@ -6980,16 +8658,16 @@
         </p:nvSpPr>
         <p:spPr>
           <a:xfrm>
-            <a:off x="548640" y="1508760"/>
-            <a:ext cx="2011680" cy="457200"/>
+            <a:off x="548640" y="1600200"/>
+            <a:ext cx="5364327" cy="640080"/>
           </a:xfrm>
           <a:prstGeom prst="roundRect">
             <a:avLst>
-              <a:gd name="adj" fmla="val 50000"/>
+              <a:gd name="adj" fmla="val 15000"/>
             </a:avLst>
           </a:prstGeom>
           <a:solidFill>
-            <a:srgbClr val="E0463A"/>
+            <a:srgbClr val="03306E"/>
           </a:solidFill>
           <a:ln>
             <a:noFill/>
@@ -7024,8 +8702,8 @@
         </p:nvSpPr>
         <p:spPr>
           <a:xfrm>
-            <a:off x="548640" y="1508760"/>
-            <a:ext cx="2011680" cy="457200"/>
+            <a:off x="777240" y="1600200"/>
+            <a:ext cx="4907127" cy="640080"/>
           </a:xfrm>
           <a:prstGeom prst="rect">
             <a:avLst/>
@@ -7036,29 +8714,73 @@
           <a:bodyPr wrap="square" anchor="ctr" lIns="0" rIns="0" tIns="0" bIns="0"/>
           <a:lstStyle/>
           <a:p>
-            <a:pPr algn="ctr"/>
-            <a:r>
-              <a:rPr sz="1400" b="1" i="0">
+            <a:pPr algn="l"/>
+            <a:r>
+              <a:rPr sz="2000" b="1" i="0">
                 <a:solidFill>
                   <a:srgbClr val="FFFFFF"/>
                 </a:solidFill>
                 <a:latin typeface="Calibri"/>
               </a:rPr>
-              <a:t>30 minutes</a:t>
-            </a:r>
-          </a:p>
-        </p:txBody>
-      </p:sp>
-      <p:sp>
-        <p:nvSpPr>
-          <p:cNvPr id="8" name="TextBox 7"/>
+              <a:t>Formats</a:t>
+            </a:r>
+          </a:p>
+        </p:txBody>
+      </p:sp>
+      <p:sp>
+        <p:nvSpPr>
+          <p:cNvPr id="8" name="Rounded Rectangle 7"/>
+          <p:cNvSpPr/>
+          <p:nvPr/>
+        </p:nvSpPr>
+        <p:spPr>
+          <a:xfrm>
+            <a:off x="548640" y="2377440"/>
+            <a:ext cx="5364327" cy="3794760"/>
+          </a:xfrm>
+          <a:prstGeom prst="roundRect">
+            <a:avLst>
+              <a:gd name="adj" fmla="val 4000"/>
+            </a:avLst>
+          </a:prstGeom>
+          <a:solidFill>
+            <a:srgbClr val="EAF3FF"/>
+          </a:solidFill>
+          <a:ln>
+            <a:noFill/>
+          </a:ln>
+          <a:effectLst/>
+        </p:spPr>
+        <p:style>
+          <a:lnRef idx="1">
+            <a:schemeClr val="accent1"/>
+          </a:lnRef>
+          <a:fillRef idx="3">
+            <a:schemeClr val="accent1"/>
+          </a:fillRef>
+          <a:effectRef idx="2">
+            <a:schemeClr val="accent1"/>
+          </a:effectRef>
+          <a:fontRef idx="minor">
+            <a:schemeClr val="lt1"/>
+          </a:fontRef>
+        </p:style>
+        <p:txBody>
+          <a:bodyPr rtlCol="0" anchor="ctr"/>
+          <a:lstStyle/>
+          <a:p/>
+        </p:txBody>
+      </p:sp>
+      <p:sp>
+        <p:nvSpPr>
+          <p:cNvPr id="9" name="TextBox 8"/>
           <p:cNvSpPr txBox="1"/>
           <p:nvPr/>
         </p:nvSpPr>
         <p:spPr>
           <a:xfrm>
-            <a:off x="2743200" y="1508760"/>
-            <a:ext cx="4754880" cy="457200"/>
+            <a:off x="822959" y="2606040"/>
+            <a:ext cx="4815687" cy="3337560"/>
           </a:xfrm>
           <a:prstGeom prst="rect">
             <a:avLst/>
@@ -7066,35 +8788,111 @@
           <a:noFill/>
         </p:spPr>
         <p:txBody>
-          <a:bodyPr wrap="square" anchor="ctr" lIns="0" rIns="0" tIns="0" bIns="0"/>
-          <a:lstStyle/>
-          <a:p>
-            <a:pPr algn="l"/>
-            <a:r>
-              <a:rPr sz="1400" b="0" i="1">
-                <a:solidFill>
-                  <a:srgbClr val="54595D"/>
-                </a:solidFill>
-                <a:latin typeface="Calibri"/>
-              </a:rPr>
-              <a:t>Pairs</a:t>
-            </a:r>
-          </a:p>
-        </p:txBody>
-      </p:sp>
-      <p:sp>
-        <p:nvSpPr>
-          <p:cNvPr id="9" name="Oval 8"/>
+          <a:bodyPr wrap="square" lIns="0" rIns="0" tIns="0" bIns="0">
+            <a:spAutoFit/>
+          </a:bodyPr>
+          <a:lstStyle/>
+          <a:p>
+            <a:pPr marL="274320" indent="-274320">
+              <a:spcAft>
+                <a:spcPts val="990"/>
+              </a:spcAft>
+              <a:buClr>
+                <a:srgbClr val="0645AD"/>
+              </a:buClr>
+              <a:buFont typeface="Arial"/>
+              <a:buChar char="•"/>
+            </a:pPr>
+            <a:r>
+              <a:rPr sz="2200" b="0">
+                <a:solidFill>
+                  <a:srgbClr val="202122"/>
+                </a:solidFill>
+                <a:latin typeface="Calibri"/>
+              </a:rPr>
+              <a:t>Sketches and schemes</a:t>
+            </a:r>
+          </a:p>
+          <a:p>
+            <a:pPr marL="274320" indent="-274320">
+              <a:spcAft>
+                <a:spcPts val="990"/>
+              </a:spcAft>
+              <a:buClr>
+                <a:srgbClr val="0645AD"/>
+              </a:buClr>
+              <a:buFont typeface="Arial"/>
+              <a:buChar char="•"/>
+            </a:pPr>
+            <a:r>
+              <a:rPr sz="2200" b="0">
+                <a:solidFill>
+                  <a:srgbClr val="202122"/>
+                </a:solidFill>
+                <a:latin typeface="Calibri"/>
+              </a:rPr>
+              <a:t>Detailed drawings and diagrams</a:t>
+            </a:r>
+          </a:p>
+          <a:p>
+            <a:pPr marL="274320" indent="-274320">
+              <a:spcAft>
+                <a:spcPts val="990"/>
+              </a:spcAft>
+              <a:buClr>
+                <a:srgbClr val="0645AD"/>
+              </a:buClr>
+              <a:buFont typeface="Arial"/>
+              <a:buChar char="•"/>
+            </a:pPr>
+            <a:r>
+              <a:rPr sz="2200" b="0">
+                <a:solidFill>
+                  <a:srgbClr val="202122"/>
+                </a:solidFill>
+                <a:latin typeface="Calibri"/>
+              </a:rPr>
+              <a:t>Models</a:t>
+            </a:r>
+          </a:p>
+          <a:p>
+            <a:pPr marL="274320" indent="-274320">
+              <a:spcAft>
+                <a:spcPts val="990"/>
+              </a:spcAft>
+              <a:buClr>
+                <a:srgbClr val="0645AD"/>
+              </a:buClr>
+              <a:buFont typeface="Arial"/>
+              <a:buChar char="•"/>
+            </a:pPr>
+            <a:r>
+              <a:rPr sz="2200" b="0">
+                <a:solidFill>
+                  <a:srgbClr val="202122"/>
+                </a:solidFill>
+                <a:latin typeface="Calibri"/>
+              </a:rPr>
+              <a:t>Reports</a:t>
+            </a:r>
+          </a:p>
+        </p:txBody>
+      </p:sp>
+      <p:sp>
+        <p:nvSpPr>
+          <p:cNvPr id="10" name="Rounded Rectangle 9"/>
           <p:cNvSpPr/>
           <p:nvPr/>
         </p:nvSpPr>
         <p:spPr>
           <a:xfrm>
-            <a:off x="548640" y="2482596"/>
-            <a:ext cx="384048" cy="384048"/>
-          </a:xfrm>
-          <a:prstGeom prst="ellipse">
-            <a:avLst/>
+            <a:off x="6278727" y="1600200"/>
+            <a:ext cx="5364327" cy="640080"/>
+          </a:xfrm>
+          <a:prstGeom prst="roundRect">
+            <a:avLst>
+              <a:gd name="adj" fmla="val 15000"/>
+            </a:avLst>
           </a:prstGeom>
           <a:solidFill>
             <a:srgbClr val="0645AD"/>
@@ -7119,327 +8917,58 @@
           </a:fontRef>
         </p:style>
         <p:txBody>
-          <a:bodyPr rtlCol="0" anchor="ctr" lIns="0" rIns="0" tIns="0" bIns="0"/>
-          <a:lstStyle/>
-          <a:p>
-            <a:pPr algn="ctr"/>
-            <a:r>
-              <a:rPr sz="1300" b="1">
+          <a:bodyPr rtlCol="0" anchor="ctr"/>
+          <a:lstStyle/>
+          <a:p/>
+        </p:txBody>
+      </p:sp>
+      <p:sp>
+        <p:nvSpPr>
+          <p:cNvPr id="11" name="TextBox 10"/>
+          <p:cNvSpPr txBox="1"/>
+          <p:nvPr/>
+        </p:nvSpPr>
+        <p:spPr>
+          <a:xfrm>
+            <a:off x="6507327" y="1600200"/>
+            <a:ext cx="4907127" cy="640080"/>
+          </a:xfrm>
+          <a:prstGeom prst="rect">
+            <a:avLst/>
+          </a:prstGeom>
+          <a:noFill/>
+        </p:spPr>
+        <p:txBody>
+          <a:bodyPr wrap="square" anchor="ctr" lIns="0" rIns="0" tIns="0" bIns="0"/>
+          <a:lstStyle/>
+          <a:p>
+            <a:pPr algn="l"/>
+            <a:r>
+              <a:rPr sz="2000" b="1" i="0">
                 <a:solidFill>
                   <a:srgbClr val="FFFFFF"/>
                 </a:solidFill>
                 <a:latin typeface="Calibri"/>
               </a:rPr>
-              <a:t>1</a:t>
-            </a:r>
-          </a:p>
-        </p:txBody>
-      </p:sp>
-      <p:sp>
-        <p:nvSpPr>
-          <p:cNvPr id="10" name="TextBox 9"/>
-          <p:cNvSpPr txBox="1"/>
-          <p:nvPr/>
-        </p:nvSpPr>
-        <p:spPr>
-          <a:xfrm>
-            <a:off x="1143000" y="2240280"/>
-            <a:ext cx="5943600" cy="868680"/>
-          </a:xfrm>
-          <a:prstGeom prst="rect">
-            <a:avLst/>
-          </a:prstGeom>
-          <a:noFill/>
-        </p:spPr>
-        <p:txBody>
-          <a:bodyPr wrap="square" anchor="ctr" lIns="0" rIns="0" tIns="0" bIns="0"/>
-          <a:lstStyle/>
-          <a:p>
-            <a:pPr algn="l"/>
-            <a:r>
-              <a:rPr sz="1700" b="0" i="0">
-                <a:solidFill>
-                  <a:srgbClr val="202122"/>
-                </a:solidFill>
-                <a:latin typeface="Calibri"/>
-              </a:rPr>
-              <a:t>Take a design you have worked on.</a:t>
-            </a:r>
-          </a:p>
-        </p:txBody>
-      </p:sp>
-      <p:sp>
-        <p:nvSpPr>
-          <p:cNvPr id="11" name="Oval 10"/>
+              <a:t>Choosing a format</a:t>
+            </a:r>
+          </a:p>
+        </p:txBody>
+      </p:sp>
+      <p:sp>
+        <p:nvSpPr>
+          <p:cNvPr id="12" name="Rounded Rectangle 11"/>
           <p:cNvSpPr/>
           <p:nvPr/>
         </p:nvSpPr>
         <p:spPr>
           <a:xfrm>
-            <a:off x="548640" y="3461004"/>
-            <a:ext cx="384048" cy="384048"/>
-          </a:xfrm>
-          <a:prstGeom prst="ellipse">
-            <a:avLst/>
-          </a:prstGeom>
-          <a:solidFill>
-            <a:srgbClr val="0645AD"/>
-          </a:solidFill>
-          <a:ln>
-            <a:noFill/>
-          </a:ln>
-          <a:effectLst/>
-        </p:spPr>
-        <p:style>
-          <a:lnRef idx="1">
-            <a:schemeClr val="accent1"/>
-          </a:lnRef>
-          <a:fillRef idx="3">
-            <a:schemeClr val="accent1"/>
-          </a:fillRef>
-          <a:effectRef idx="2">
-            <a:schemeClr val="accent1"/>
-          </a:effectRef>
-          <a:fontRef idx="minor">
-            <a:schemeClr val="lt1"/>
-          </a:fontRef>
-        </p:style>
-        <p:txBody>
-          <a:bodyPr rtlCol="0" anchor="ctr" lIns="0" rIns="0" tIns="0" bIns="0"/>
-          <a:lstStyle/>
-          <a:p>
-            <a:pPr algn="ctr"/>
-            <a:r>
-              <a:rPr sz="1300" b="1">
-                <a:solidFill>
-                  <a:srgbClr val="FFFFFF"/>
-                </a:solidFill>
-                <a:latin typeface="Calibri"/>
-              </a:rPr>
-              <a:t>2</a:t>
-            </a:r>
-          </a:p>
-        </p:txBody>
-      </p:sp>
-      <p:sp>
-        <p:nvSpPr>
-          <p:cNvPr id="12" name="TextBox 11"/>
-          <p:cNvSpPr txBox="1"/>
-          <p:nvPr/>
-        </p:nvSpPr>
-        <p:spPr>
-          <a:xfrm>
-            <a:off x="1143000" y="3218688"/>
-            <a:ext cx="5943600" cy="868680"/>
-          </a:xfrm>
-          <a:prstGeom prst="rect">
-            <a:avLst/>
-          </a:prstGeom>
-          <a:noFill/>
-        </p:spPr>
-        <p:txBody>
-          <a:bodyPr wrap="square" anchor="ctr" lIns="0" rIns="0" tIns="0" bIns="0"/>
-          <a:lstStyle/>
-          <a:p>
-            <a:pPr algn="l"/>
-            <a:r>
-              <a:rPr sz="1700" b="0" i="0">
-                <a:solidFill>
-                  <a:srgbClr val="202122"/>
-                </a:solidFill>
-                <a:latin typeface="Calibri"/>
-              </a:rPr>
-              <a:t>Produce a revision-controlled drawing with full annotations.</a:t>
-            </a:r>
-          </a:p>
-        </p:txBody>
-      </p:sp>
-      <p:sp>
-        <p:nvSpPr>
-          <p:cNvPr id="13" name="Oval 12"/>
-          <p:cNvSpPr/>
-          <p:nvPr/>
-        </p:nvSpPr>
-        <p:spPr>
-          <a:xfrm>
-            <a:off x="548640" y="4439412"/>
-            <a:ext cx="384048" cy="384048"/>
-          </a:xfrm>
-          <a:prstGeom prst="ellipse">
-            <a:avLst/>
-          </a:prstGeom>
-          <a:solidFill>
-            <a:srgbClr val="0645AD"/>
-          </a:solidFill>
-          <a:ln>
-            <a:noFill/>
-          </a:ln>
-          <a:effectLst/>
-        </p:spPr>
-        <p:style>
-          <a:lnRef idx="1">
-            <a:schemeClr val="accent1"/>
-          </a:lnRef>
-          <a:fillRef idx="3">
-            <a:schemeClr val="accent1"/>
-          </a:fillRef>
-          <a:effectRef idx="2">
-            <a:schemeClr val="accent1"/>
-          </a:effectRef>
-          <a:fontRef idx="minor">
-            <a:schemeClr val="lt1"/>
-          </a:fontRef>
-        </p:style>
-        <p:txBody>
-          <a:bodyPr rtlCol="0" anchor="ctr" lIns="0" rIns="0" tIns="0" bIns="0"/>
-          <a:lstStyle/>
-          <a:p>
-            <a:pPr algn="ctr"/>
-            <a:r>
-              <a:rPr sz="1300" b="1">
-                <a:solidFill>
-                  <a:srgbClr val="FFFFFF"/>
-                </a:solidFill>
-                <a:latin typeface="Calibri"/>
-              </a:rPr>
-              <a:t>3</a:t>
-            </a:r>
-          </a:p>
-        </p:txBody>
-      </p:sp>
-      <p:sp>
-        <p:nvSpPr>
-          <p:cNvPr id="14" name="TextBox 13"/>
-          <p:cNvSpPr txBox="1"/>
-          <p:nvPr/>
-        </p:nvSpPr>
-        <p:spPr>
-          <a:xfrm>
-            <a:off x="1143000" y="4197096"/>
-            <a:ext cx="5943600" cy="868680"/>
-          </a:xfrm>
-          <a:prstGeom prst="rect">
-            <a:avLst/>
-          </a:prstGeom>
-          <a:noFill/>
-        </p:spPr>
-        <p:txBody>
-          <a:bodyPr wrap="square" anchor="ctr" lIns="0" rIns="0" tIns="0" bIns="0"/>
-          <a:lstStyle/>
-          <a:p>
-            <a:pPr algn="l"/>
-            <a:r>
-              <a:rPr sz="1700" b="0" i="0">
-                <a:solidFill>
-                  <a:srgbClr val="202122"/>
-                </a:solidFill>
-                <a:latin typeface="Calibri"/>
-              </a:rPr>
-              <a:t>Write a one-page summary for the client.</a:t>
-            </a:r>
-          </a:p>
-        </p:txBody>
-      </p:sp>
-      <p:sp>
-        <p:nvSpPr>
-          <p:cNvPr id="15" name="Oval 14"/>
-          <p:cNvSpPr/>
-          <p:nvPr/>
-        </p:nvSpPr>
-        <p:spPr>
-          <a:xfrm>
-            <a:off x="548640" y="5417820"/>
-            <a:ext cx="384048" cy="384048"/>
-          </a:xfrm>
-          <a:prstGeom prst="ellipse">
-            <a:avLst/>
-          </a:prstGeom>
-          <a:solidFill>
-            <a:srgbClr val="0645AD"/>
-          </a:solidFill>
-          <a:ln>
-            <a:noFill/>
-          </a:ln>
-          <a:effectLst/>
-        </p:spPr>
-        <p:style>
-          <a:lnRef idx="1">
-            <a:schemeClr val="accent1"/>
-          </a:lnRef>
-          <a:fillRef idx="3">
-            <a:schemeClr val="accent1"/>
-          </a:fillRef>
-          <a:effectRef idx="2">
-            <a:schemeClr val="accent1"/>
-          </a:effectRef>
-          <a:fontRef idx="minor">
-            <a:schemeClr val="lt1"/>
-          </a:fontRef>
-        </p:style>
-        <p:txBody>
-          <a:bodyPr rtlCol="0" anchor="ctr" lIns="0" rIns="0" tIns="0" bIns="0"/>
-          <a:lstStyle/>
-          <a:p>
-            <a:pPr algn="ctr"/>
-            <a:r>
-              <a:rPr sz="1300" b="1">
-                <a:solidFill>
-                  <a:srgbClr val="FFFFFF"/>
-                </a:solidFill>
-                <a:latin typeface="Calibri"/>
-              </a:rPr>
-              <a:t>4</a:t>
-            </a:r>
-          </a:p>
-        </p:txBody>
-      </p:sp>
-      <p:sp>
-        <p:nvSpPr>
-          <p:cNvPr id="16" name="TextBox 15"/>
-          <p:cNvSpPr txBox="1"/>
-          <p:nvPr/>
-        </p:nvSpPr>
-        <p:spPr>
-          <a:xfrm>
-            <a:off x="1143000" y="5175504"/>
-            <a:ext cx="5943600" cy="868680"/>
-          </a:xfrm>
-          <a:prstGeom prst="rect">
-            <a:avLst/>
-          </a:prstGeom>
-          <a:noFill/>
-        </p:spPr>
-        <p:txBody>
-          <a:bodyPr wrap="square" anchor="ctr" lIns="0" rIns="0" tIns="0" bIns="0"/>
-          <a:lstStyle/>
-          <a:p>
-            <a:pPr algn="l"/>
-            <a:r>
-              <a:rPr sz="1700" b="0" i="0">
-                <a:solidFill>
-                  <a:srgbClr val="202122"/>
-                </a:solidFill>
-                <a:latin typeface="Calibri"/>
-              </a:rPr>
-              <a:t>Log one design change with a change note.</a:t>
-            </a:r>
-          </a:p>
-        </p:txBody>
-      </p:sp>
-      <p:sp>
-        <p:nvSpPr>
-          <p:cNvPr id="17" name="Rounded Rectangle 16"/>
-          <p:cNvSpPr/>
-          <p:nvPr/>
-        </p:nvSpPr>
-        <p:spPr>
-          <a:xfrm>
-            <a:off x="7772400" y="1508760"/>
-            <a:ext cx="3867912" cy="4572000"/>
+            <a:off x="6278727" y="2377440"/>
+            <a:ext cx="5364327" cy="3794760"/>
           </a:xfrm>
           <a:prstGeom prst="roundRect">
             <a:avLst>
-              <a:gd name="adj" fmla="val 8000"/>
+              <a:gd name="adj" fmla="val 4000"/>
             </a:avLst>
           </a:prstGeom>
           <a:solidFill>
@@ -7472,47 +9001,14 @@
       </p:sp>
       <p:sp>
         <p:nvSpPr>
-          <p:cNvPr id="18" name="TextBox 17"/>
+          <p:cNvPr id="13" name="TextBox 12"/>
           <p:cNvSpPr txBox="1"/>
           <p:nvPr/>
         </p:nvSpPr>
         <p:spPr>
           <a:xfrm>
-            <a:off x="8046720" y="1737360"/>
-            <a:ext cx="3291840" cy="365760"/>
-          </a:xfrm>
-          <a:prstGeom prst="rect">
-            <a:avLst/>
-          </a:prstGeom>
-          <a:noFill/>
-        </p:spPr>
-        <p:txBody>
-          <a:bodyPr wrap="square" anchor="t" lIns="0" rIns="0" tIns="0" bIns="0"/>
-          <a:lstStyle/>
-          <a:p>
-            <a:pPr algn="l"/>
-            <a:r>
-              <a:rPr sz="1300" b="1" i="0">
-                <a:solidFill>
-                  <a:srgbClr val="0645AD"/>
-                </a:solidFill>
-                <a:latin typeface="Calibri"/>
-              </a:rPr>
-              <a:t>SUCCESS CRITERIA</a:t>
-            </a:r>
-          </a:p>
-        </p:txBody>
-      </p:sp>
-      <p:sp>
-        <p:nvSpPr>
-          <p:cNvPr id="19" name="TextBox 18"/>
-          <p:cNvSpPr txBox="1"/>
-          <p:nvPr/>
-        </p:nvSpPr>
-        <p:spPr>
-          <a:xfrm>
-            <a:off x="8046720" y="2240280"/>
-            <a:ext cx="3337560" cy="3657600"/>
+            <a:off x="6553047" y="2606040"/>
+            <a:ext cx="4815687" cy="3337560"/>
           </a:xfrm>
           <a:prstGeom prst="rect">
             <a:avLst/>
@@ -7527,7 +9023,7 @@
           <a:p>
             <a:pPr marL="274320" indent="-274320">
               <a:spcAft>
-                <a:spcPts val="810"/>
+                <a:spcPts val="990"/>
               </a:spcAft>
               <a:buClr>
                 <a:srgbClr val="0645AD"/>
@@ -7536,19 +9032,19 @@
               <a:buChar char="•"/>
             </a:pPr>
             <a:r>
-              <a:rPr sz="1800" b="0">
+              <a:rPr sz="2200" b="0">
                 <a:solidFill>
                   <a:srgbClr val="202122"/>
                 </a:solidFill>
                 <a:latin typeface="Calibri"/>
               </a:rPr>
-              <a:t>Annotations correct</a:t>
+              <a:t>Cost and time</a:t>
             </a:r>
           </a:p>
           <a:p>
             <a:pPr marL="274320" indent="-274320">
               <a:spcAft>
-                <a:spcPts val="810"/>
+                <a:spcPts val="990"/>
               </a:spcAft>
               <a:buClr>
                 <a:srgbClr val="0645AD"/>
@@ -7557,19 +9053,19 @@
               <a:buChar char="•"/>
             </a:pPr>
             <a:r>
-              <a:rPr sz="1800" b="0">
+              <a:rPr sz="2200" b="0">
                 <a:solidFill>
                   <a:srgbClr val="202122"/>
                 </a:solidFill>
                 <a:latin typeface="Calibri"/>
               </a:rPr>
-              <a:t>Revision control used</a:t>
+              <a:t>Availability</a:t>
             </a:r>
           </a:p>
           <a:p>
             <a:pPr marL="274320" indent="-274320">
               <a:spcAft>
-                <a:spcPts val="810"/>
+                <a:spcPts val="990"/>
               </a:spcAft>
               <a:buClr>
                 <a:srgbClr val="0645AD"/>
@@ -7578,13 +9074,34 @@
               <a:buChar char="•"/>
             </a:pPr>
             <a:r>
-              <a:rPr sz="1800" b="0">
+              <a:rPr sz="2200" b="0">
                 <a:solidFill>
                   <a:srgbClr val="202122"/>
                 </a:solidFill>
                 <a:latin typeface="Calibri"/>
               </a:rPr>
-              <a:t>Summary suits a non-technical reader</a:t>
+              <a:t>The end user</a:t>
+            </a:r>
+          </a:p>
+          <a:p>
+            <a:pPr marL="274320" indent="-274320">
+              <a:spcAft>
+                <a:spcPts val="990"/>
+              </a:spcAft>
+              <a:buClr>
+                <a:srgbClr val="0645AD"/>
+              </a:buClr>
+              <a:buFont typeface="Arial"/>
+              <a:buChar char="•"/>
+            </a:pPr>
+            <a:r>
+              <a:rPr sz="2200" b="0">
+                <a:solidFill>
+                  <a:srgbClr val="202122"/>
+                </a:solidFill>
+                <a:latin typeface="Calibri"/>
+              </a:rPr>
+              <a:t>The scale of the project</a:t>
             </a:r>
           </a:p>
         </p:txBody>
@@ -7603,7 +9120,7 @@
     <p:bg>
       <p:bgPr>
         <a:solidFill>
-          <a:srgbClr val="03306E"/>
+          <a:srgbClr val="FFFFFF"/>
         </a:solidFill>
         <a:effectLst/>
       </p:bgPr>
@@ -7639,7 +9156,7 @@
             <a:r>
               <a:rPr sz="1100" b="1" i="0">
                 <a:solidFill>
-                  <a:srgbClr val="A9C8F0"/>
+                  <a:srgbClr val="54595D"/>
                 </a:solidFill>
                 <a:latin typeface="Calibri"/>
               </a:rPr>
@@ -7672,24 +9189,90 @@
             <a:r>
               <a:rPr sz="3200" b="1" i="0">
                 <a:solidFill>
-                  <a:srgbClr val="FFFFFF"/>
+                  <a:srgbClr val="03306E"/>
                 </a:solidFill>
                 <a:latin typeface="Cambria"/>
               </a:rPr>
-              <a:t>Exit ticket</a:t>
-            </a:r>
-          </a:p>
-        </p:txBody>
-      </p:sp>
-      <p:sp>
-        <p:nvSpPr>
-          <p:cNvPr id="4" name="Oval 3"/>
+              <a:t>Quick check: Communicating design information</a:t>
+            </a:r>
+          </a:p>
+        </p:txBody>
+      </p:sp>
+      <p:sp>
+        <p:nvSpPr>
+          <p:cNvPr id="4" name="TextBox 3"/>
+          <p:cNvSpPr txBox="1"/>
+          <p:nvPr/>
+        </p:nvSpPr>
+        <p:spPr>
+          <a:xfrm>
+            <a:off x="548640" y="6446520"/>
+            <a:ext cx="8229600" cy="274320"/>
+          </a:xfrm>
+          <a:prstGeom prst="rect">
+            <a:avLst/>
+          </a:prstGeom>
+          <a:noFill/>
+        </p:spPr>
+        <p:txBody>
+          <a:bodyPr wrap="square" anchor="t" lIns="0" rIns="0" tIns="0" bIns="0"/>
+          <a:lstStyle/>
+          <a:p>
+            <a:pPr algn="l"/>
+            <a:r>
+              <a:rPr sz="1000" b="0" i="0">
+                <a:solidFill>
+                  <a:srgbClr val="54595D"/>
+                </a:solidFill>
+                <a:latin typeface="Calibri"/>
+              </a:rPr>
+              <a:t>Design and Development for Engineering and Manufacturing T Level  ·  Technical Documentation and Communication</a:t>
+            </a:r>
+          </a:p>
+        </p:txBody>
+      </p:sp>
+      <p:sp>
+        <p:nvSpPr>
+          <p:cNvPr id="5" name="TextBox 4"/>
+          <p:cNvSpPr txBox="1"/>
+          <p:nvPr/>
+        </p:nvSpPr>
+        <p:spPr>
+          <a:xfrm>
+            <a:off x="10728655" y="6446520"/>
+            <a:ext cx="914400" cy="274320"/>
+          </a:xfrm>
+          <a:prstGeom prst="rect">
+            <a:avLst/>
+          </a:prstGeom>
+          <a:noFill/>
+        </p:spPr>
+        <p:txBody>
+          <a:bodyPr wrap="square" anchor="t" lIns="0" rIns="0" tIns="0" bIns="0"/>
+          <a:lstStyle/>
+          <a:p>
+            <a:pPr algn="r"/>
+            <a:r>
+              <a:rPr sz="1000" b="0" i="0">
+                <a:solidFill>
+                  <a:srgbClr val="54595D"/>
+                </a:solidFill>
+                <a:latin typeface="Calibri"/>
+              </a:rPr>
+              <a:t>8</a:t>
+            </a:r>
+          </a:p>
+        </p:txBody>
+      </p:sp>
+      <p:sp>
+        <p:nvSpPr>
+          <p:cNvPr id="6" name="Oval 5"/>
           <p:cNvSpPr/>
           <p:nvPr/>
         </p:nvSpPr>
         <p:spPr>
           <a:xfrm>
-            <a:off x="548640" y="1737360"/>
+            <a:off x="548640" y="1691640"/>
             <a:ext cx="502920" cy="502920"/>
           </a:xfrm>
           <a:prstGeom prst="ellipse">
@@ -7723,7 +9306,7 @@
           <a:p>
             <a:pPr algn="ctr"/>
             <a:r>
-              <a:rPr sz="1700" b="1">
+              <a:rPr sz="1600" b="1">
                 <a:solidFill>
                   <a:srgbClr val="FFFFFF"/>
                 </a:solidFill>
@@ -7736,14 +9319,14 @@
       </p:sp>
       <p:sp>
         <p:nvSpPr>
-          <p:cNvPr id="5" name="TextBox 4"/>
+          <p:cNvPr id="7" name="TextBox 6"/>
           <p:cNvSpPr txBox="1"/>
           <p:nvPr/>
         </p:nvSpPr>
         <p:spPr>
           <a:xfrm>
-            <a:off x="1325880" y="1645920"/>
-            <a:ext cx="6583680" cy="822960"/>
+            <a:off x="1371600" y="1645920"/>
+            <a:ext cx="10271455" cy="1188720"/>
           </a:xfrm>
           <a:prstGeom prst="rect">
             <a:avLst/>
@@ -7751,31 +9334,31 @@
           <a:noFill/>
         </p:spPr>
         <p:txBody>
-          <a:bodyPr wrap="square" anchor="ctr" lIns="0" rIns="0" tIns="0" bIns="0"/>
+          <a:bodyPr wrap="square" anchor="t" lIns="0" rIns="0" tIns="0" bIns="0"/>
           <a:lstStyle/>
           <a:p>
             <a:pPr algn="l"/>
             <a:r>
-              <a:rPr sz="2000" b="0" i="0">
-                <a:solidFill>
-                  <a:srgbClr val="FFFFFF"/>
-                </a:solidFill>
-                <a:latin typeface="Calibri"/>
-              </a:rPr>
-              <a:t>What is a surface finish symbol for?</a:t>
-            </a:r>
-          </a:p>
-        </p:txBody>
-      </p:sp>
-      <p:sp>
-        <p:nvSpPr>
-          <p:cNvPr id="6" name="Oval 5"/>
+              <a:rPr sz="2400" b="0" i="0">
+                <a:solidFill>
+                  <a:srgbClr val="202122"/>
+                </a:solidFill>
+                <a:latin typeface="Calibri"/>
+              </a:rPr>
+              <a:t>Name three formats for communicating design information.</a:t>
+            </a:r>
+          </a:p>
+        </p:txBody>
+      </p:sp>
+      <p:sp>
+        <p:nvSpPr>
+          <p:cNvPr id="8" name="Oval 7"/>
           <p:cNvSpPr/>
           <p:nvPr/>
         </p:nvSpPr>
         <p:spPr>
           <a:xfrm>
-            <a:off x="548640" y="2697480"/>
+            <a:off x="548640" y="3108960"/>
             <a:ext cx="502920" cy="502920"/>
           </a:xfrm>
           <a:prstGeom prst="ellipse">
@@ -7809,7 +9392,7 @@
           <a:p>
             <a:pPr algn="ctr"/>
             <a:r>
-              <a:rPr sz="1700" b="1">
+              <a:rPr sz="1600" b="1">
                 <a:solidFill>
                   <a:srgbClr val="FFFFFF"/>
                 </a:solidFill>
@@ -7822,14 +9405,14 @@
       </p:sp>
       <p:sp>
         <p:nvSpPr>
-          <p:cNvPr id="7" name="TextBox 6"/>
+          <p:cNvPr id="9" name="TextBox 8"/>
           <p:cNvSpPr txBox="1"/>
           <p:nvPr/>
         </p:nvSpPr>
         <p:spPr>
           <a:xfrm>
-            <a:off x="1325880" y="2606040"/>
-            <a:ext cx="6583680" cy="822960"/>
+            <a:off x="1371600" y="3063240"/>
+            <a:ext cx="10271455" cy="1188720"/>
           </a:xfrm>
           <a:prstGeom prst="rect">
             <a:avLst/>
@@ -7837,31 +9420,31 @@
           <a:noFill/>
         </p:spPr>
         <p:txBody>
-          <a:bodyPr wrap="square" anchor="ctr" lIns="0" rIns="0" tIns="0" bIns="0"/>
+          <a:bodyPr wrap="square" anchor="t" lIns="0" rIns="0" tIns="0" bIns="0"/>
           <a:lstStyle/>
           <a:p>
             <a:pPr algn="l"/>
             <a:r>
-              <a:rPr sz="2000" b="0" i="0">
-                <a:solidFill>
-                  <a:srgbClr val="FFFFFF"/>
-                </a:solidFill>
-                <a:latin typeface="Calibri"/>
-              </a:rPr>
-              <a:t>Why is SharePoint useful for teams?</a:t>
-            </a:r>
-          </a:p>
-        </p:txBody>
-      </p:sp>
-      <p:sp>
-        <p:nvSpPr>
-          <p:cNvPr id="8" name="Oval 7"/>
+              <a:rPr sz="2400" b="0" i="0">
+                <a:solidFill>
+                  <a:srgbClr val="202122"/>
+                </a:solidFill>
+                <a:latin typeface="Calibri"/>
+              </a:rPr>
+              <a:t>What decides the format?</a:t>
+            </a:r>
+          </a:p>
+        </p:txBody>
+      </p:sp>
+      <p:sp>
+        <p:nvSpPr>
+          <p:cNvPr id="10" name="Oval 9"/>
           <p:cNvSpPr/>
           <p:nvPr/>
         </p:nvSpPr>
         <p:spPr>
           <a:xfrm>
-            <a:off x="548640" y="3657600"/>
+            <a:off x="548640" y="4526280"/>
             <a:ext cx="502920" cy="502920"/>
           </a:xfrm>
           <a:prstGeom prst="ellipse">
@@ -7895,7 +9478,7 @@
           <a:p>
             <a:pPr algn="ctr"/>
             <a:r>
-              <a:rPr sz="1700" b="1">
+              <a:rPr sz="1600" b="1">
                 <a:solidFill>
                   <a:srgbClr val="FFFFFF"/>
                 </a:solidFill>
@@ -7908,14 +9491,14 @@
       </p:sp>
       <p:sp>
         <p:nvSpPr>
-          <p:cNvPr id="9" name="TextBox 8"/>
+          <p:cNvPr id="11" name="TextBox 10"/>
           <p:cNvSpPr txBox="1"/>
           <p:nvPr/>
         </p:nvSpPr>
         <p:spPr>
           <a:xfrm>
-            <a:off x="1325880" y="3566160"/>
-            <a:ext cx="6583680" cy="822960"/>
+            <a:off x="1371600" y="4480560"/>
+            <a:ext cx="10271455" cy="1188720"/>
           </a:xfrm>
           <a:prstGeom prst="rect">
             <a:avLst/>
@@ -7923,40 +9506,229 @@
           <a:noFill/>
         </p:spPr>
         <p:txBody>
+          <a:bodyPr wrap="square" anchor="t" lIns="0" rIns="0" tIns="0" bIns="0"/>
+          <a:lstStyle/>
+          <a:p>
+            <a:pPr algn="l"/>
+            <a:r>
+              <a:rPr sz="2400" b="0" i="0">
+                <a:solidFill>
+                  <a:srgbClr val="202122"/>
+                </a:solidFill>
+                <a:latin typeface="Calibri"/>
+              </a:rPr>
+              <a:t>Why show each stage of the design process?</a:t>
+            </a:r>
+          </a:p>
+        </p:txBody>
+      </p:sp>
+      <p:sp>
+        <p:nvSpPr>
+          <p:cNvPr id="12" name="TextBox 11"/>
+          <p:cNvSpPr txBox="1"/>
+          <p:nvPr/>
+        </p:nvSpPr>
+        <p:spPr>
+          <a:xfrm>
+            <a:off x="548640" y="5852160"/>
+            <a:ext cx="11094415" cy="365760"/>
+          </a:xfrm>
+          <a:prstGeom prst="rect">
+            <a:avLst/>
+          </a:prstGeom>
+          <a:noFill/>
+        </p:spPr>
+        <p:txBody>
+          <a:bodyPr wrap="square" anchor="t" lIns="0" rIns="0" tIns="0" bIns="0"/>
+          <a:lstStyle/>
+          <a:p>
+            <a:pPr algn="l"/>
+            <a:r>
+              <a:rPr sz="1300" b="0" i="1">
+                <a:solidFill>
+                  <a:srgbClr val="54595D"/>
+                </a:solidFill>
+                <a:latin typeface="Calibri"/>
+              </a:rPr>
+              <a:t>Answer on mini whiteboards or in your book. Answers are in the speaker notes.</a:t>
+            </a:r>
+          </a:p>
+        </p:txBody>
+      </p:sp>
+    </p:spTree>
+  </p:cSld>
+  <p:clrMapOvr>
+    <a:masterClrMapping/>
+  </p:clrMapOvr>
+</p:sld>
+</file>
+
+<file path=ppt/slides/slide9.xml><?xml version="1.0" encoding="utf-8"?>
+<p:sld xmlns:a="http://schemas.openxmlformats.org/drawingml/2006/main" xmlns:p="http://schemas.openxmlformats.org/presentationml/2006/main" xmlns:r="http://schemas.openxmlformats.org/officeDocument/2006/relationships">
+  <p:cSld>
+    <p:bg>
+      <p:bgPr>
+        <a:solidFill>
+          <a:srgbClr val="FFFFFF"/>
+        </a:solidFill>
+        <a:effectLst/>
+      </p:bgPr>
+    </p:bg>
+    <p:spTree>
+      <p:nvGrpSpPr>
+        <p:cNvPr id="1" name=""/>
+        <p:cNvGrpSpPr/>
+        <p:nvPr/>
+      </p:nvGrpSpPr>
+      <p:grpSpPr/>
+      <p:sp>
+        <p:nvSpPr>
+          <p:cNvPr id="2" name="TextBox 1"/>
+          <p:cNvSpPr txBox="1"/>
+          <p:nvPr/>
+        </p:nvSpPr>
+        <p:spPr>
+          <a:xfrm>
+            <a:off x="548640" y="320040"/>
+            <a:ext cx="11094415" cy="274320"/>
+          </a:xfrm>
+          <a:prstGeom prst="rect">
+            <a:avLst/>
+          </a:prstGeom>
+          <a:noFill/>
+        </p:spPr>
+        <p:txBody>
+          <a:bodyPr wrap="square" anchor="t" lIns="0" rIns="0" tIns="0" bIns="0"/>
+          <a:lstStyle/>
+          <a:p>
+            <a:pPr algn="l"/>
+            <a:r>
+              <a:rPr sz="1100" b="1" i="0">
+                <a:solidFill>
+                  <a:srgbClr val="54595D"/>
+                </a:solidFill>
+                <a:latin typeface="Calibri"/>
+              </a:rPr>
+              <a:t>MECHANICAL ENGINEERING  ·  Mechanical: Performance Outcome 6</a:t>
+            </a:r>
+          </a:p>
+        </p:txBody>
+      </p:sp>
+      <p:sp>
+        <p:nvSpPr>
+          <p:cNvPr id="3" name="TextBox 2"/>
+          <p:cNvSpPr txBox="1"/>
+          <p:nvPr/>
+        </p:nvSpPr>
+        <p:spPr>
+          <a:xfrm>
+            <a:off x="548640" y="566928"/>
+            <a:ext cx="11094415" cy="822960"/>
+          </a:xfrm>
+          <a:prstGeom prst="rect">
+            <a:avLst/>
+          </a:prstGeom>
+          <a:noFill/>
+        </p:spPr>
+        <p:txBody>
           <a:bodyPr wrap="square" anchor="ctr" lIns="0" rIns="0" tIns="0" bIns="0"/>
           <a:lstStyle/>
           <a:p>
             <a:pPr algn="l"/>
             <a:r>
-              <a:rPr sz="2000" b="0" i="0">
-                <a:solidFill>
-                  <a:srgbClr val="FFFFFF"/>
-                </a:solidFill>
-                <a:latin typeface="Calibri"/>
-              </a:rPr>
-              <a:t>How do you choose a communication format?</a:t>
-            </a:r>
-          </a:p>
-        </p:txBody>
-      </p:sp>
-      <p:sp>
-        <p:nvSpPr>
-          <p:cNvPr id="10" name="Rounded Rectangle 9"/>
+              <a:rPr sz="3200" b="1" i="0">
+                <a:solidFill>
+                  <a:srgbClr val="03306E"/>
+                </a:solidFill>
+                <a:latin typeface="Cambria"/>
+              </a:rPr>
+              <a:t>Check your understanding</a:t>
+            </a:r>
+          </a:p>
+        </p:txBody>
+      </p:sp>
+      <p:sp>
+        <p:nvSpPr>
+          <p:cNvPr id="4" name="TextBox 3"/>
+          <p:cNvSpPr txBox="1"/>
+          <p:nvPr/>
+        </p:nvSpPr>
+        <p:spPr>
+          <a:xfrm>
+            <a:off x="548640" y="6446520"/>
+            <a:ext cx="8229600" cy="274320"/>
+          </a:xfrm>
+          <a:prstGeom prst="rect">
+            <a:avLst/>
+          </a:prstGeom>
+          <a:noFill/>
+        </p:spPr>
+        <p:txBody>
+          <a:bodyPr wrap="square" anchor="t" lIns="0" rIns="0" tIns="0" bIns="0"/>
+          <a:lstStyle/>
+          <a:p>
+            <a:pPr algn="l"/>
+            <a:r>
+              <a:rPr sz="1000" b="0" i="0">
+                <a:solidFill>
+                  <a:srgbClr val="54595D"/>
+                </a:solidFill>
+                <a:latin typeface="Calibri"/>
+              </a:rPr>
+              <a:t>Design and Development for Engineering and Manufacturing T Level  ·  Technical Documentation and Communication</a:t>
+            </a:r>
+          </a:p>
+        </p:txBody>
+      </p:sp>
+      <p:sp>
+        <p:nvSpPr>
+          <p:cNvPr id="5" name="TextBox 4"/>
+          <p:cNvSpPr txBox="1"/>
+          <p:nvPr/>
+        </p:nvSpPr>
+        <p:spPr>
+          <a:xfrm>
+            <a:off x="10728655" y="6446520"/>
+            <a:ext cx="914400" cy="274320"/>
+          </a:xfrm>
+          <a:prstGeom prst="rect">
+            <a:avLst/>
+          </a:prstGeom>
+          <a:noFill/>
+        </p:spPr>
+        <p:txBody>
+          <a:bodyPr wrap="square" anchor="t" lIns="0" rIns="0" tIns="0" bIns="0"/>
+          <a:lstStyle/>
+          <a:p>
+            <a:pPr algn="r"/>
+            <a:r>
+              <a:rPr sz="1000" b="0" i="0">
+                <a:solidFill>
+                  <a:srgbClr val="54595D"/>
+                </a:solidFill>
+                <a:latin typeface="Calibri"/>
+              </a:rPr>
+              <a:t>9</a:t>
+            </a:r>
+          </a:p>
+        </p:txBody>
+      </p:sp>
+      <p:sp>
+        <p:nvSpPr>
+          <p:cNvPr id="6" name="Oval 5"/>
           <p:cNvSpPr/>
           <p:nvPr/>
         </p:nvSpPr>
         <p:spPr>
           <a:xfrm>
-            <a:off x="8229600" y="1645920"/>
-            <a:ext cx="3410712" cy="2926080"/>
-          </a:xfrm>
-          <a:prstGeom prst="roundRect">
-            <a:avLst>
-              <a:gd name="adj" fmla="val 8000"/>
-            </a:avLst>
+            <a:off x="548640" y="1618488"/>
+            <a:ext cx="411480" cy="411480"/>
+          </a:xfrm>
+          <a:prstGeom prst="ellipse">
+            <a:avLst/>
           </a:prstGeom>
           <a:solidFill>
-            <a:srgbClr val="0645AD"/>
+            <a:srgbClr val="E0463A"/>
           </a:solidFill>
           <a:ln>
             <a:noFill/>
@@ -7978,9 +9750,192 @@
           </a:fontRef>
         </p:style>
         <p:txBody>
-          <a:bodyPr rtlCol="0" anchor="ctr"/>
-          <a:lstStyle/>
-          <a:p/>
+          <a:bodyPr rtlCol="0" anchor="ctr" lIns="0" rIns="0" tIns="0" bIns="0"/>
+          <a:lstStyle/>
+          <a:p>
+            <a:pPr algn="ctr"/>
+            <a:r>
+              <a:rPr sz="1400" b="1">
+                <a:solidFill>
+                  <a:srgbClr val="FFFFFF"/>
+                </a:solidFill>
+                <a:latin typeface="Calibri"/>
+              </a:rPr>
+              <a:t>1</a:t>
+            </a:r>
+          </a:p>
+        </p:txBody>
+      </p:sp>
+      <p:sp>
+        <p:nvSpPr>
+          <p:cNvPr id="7" name="TextBox 6"/>
+          <p:cNvSpPr txBox="1"/>
+          <p:nvPr/>
+        </p:nvSpPr>
+        <p:spPr>
+          <a:xfrm>
+            <a:off x="1234440" y="1600200"/>
+            <a:ext cx="10408615" cy="1429512"/>
+          </a:xfrm>
+          <a:prstGeom prst="rect">
+            <a:avLst/>
+          </a:prstGeom>
+          <a:noFill/>
+        </p:spPr>
+        <p:txBody>
+          <a:bodyPr wrap="square" anchor="t" lIns="0" rIns="0" tIns="0" bIns="0"/>
+          <a:lstStyle/>
+          <a:p>
+            <a:pPr algn="l"/>
+            <a:r>
+              <a:rPr sz="2200" b="0" i="0">
+                <a:solidFill>
+                  <a:srgbClr val="202122"/>
+                </a:solidFill>
+                <a:latin typeface="Calibri"/>
+              </a:rPr>
+              <a:t>Why use revision letters on drawings?</a:t>
+            </a:r>
+          </a:p>
+        </p:txBody>
+      </p:sp>
+      <p:sp>
+        <p:nvSpPr>
+          <p:cNvPr id="8" name="Oval 7"/>
+          <p:cNvSpPr/>
+          <p:nvPr/>
+        </p:nvSpPr>
+        <p:spPr>
+          <a:xfrm>
+            <a:off x="548640" y="3212592"/>
+            <a:ext cx="411480" cy="411480"/>
+          </a:xfrm>
+          <a:prstGeom prst="ellipse">
+            <a:avLst/>
+          </a:prstGeom>
+          <a:solidFill>
+            <a:srgbClr val="E0463A"/>
+          </a:solidFill>
+          <a:ln>
+            <a:noFill/>
+          </a:ln>
+          <a:effectLst/>
+        </p:spPr>
+        <p:style>
+          <a:lnRef idx="1">
+            <a:schemeClr val="accent1"/>
+          </a:lnRef>
+          <a:fillRef idx="3">
+            <a:schemeClr val="accent1"/>
+          </a:fillRef>
+          <a:effectRef idx="2">
+            <a:schemeClr val="accent1"/>
+          </a:effectRef>
+          <a:fontRef idx="minor">
+            <a:schemeClr val="lt1"/>
+          </a:fontRef>
+        </p:style>
+        <p:txBody>
+          <a:bodyPr rtlCol="0" anchor="ctr" lIns="0" rIns="0" tIns="0" bIns="0"/>
+          <a:lstStyle/>
+          <a:p>
+            <a:pPr algn="ctr"/>
+            <a:r>
+              <a:rPr sz="1400" b="1">
+                <a:solidFill>
+                  <a:srgbClr val="FFFFFF"/>
+                </a:solidFill>
+                <a:latin typeface="Calibri"/>
+              </a:rPr>
+              <a:t>2</a:t>
+            </a:r>
+          </a:p>
+        </p:txBody>
+      </p:sp>
+      <p:sp>
+        <p:nvSpPr>
+          <p:cNvPr id="9" name="TextBox 8"/>
+          <p:cNvSpPr txBox="1"/>
+          <p:nvPr/>
+        </p:nvSpPr>
+        <p:spPr>
+          <a:xfrm>
+            <a:off x="1234440" y="3194304"/>
+            <a:ext cx="10408615" cy="1429512"/>
+          </a:xfrm>
+          <a:prstGeom prst="rect">
+            <a:avLst/>
+          </a:prstGeom>
+          <a:noFill/>
+        </p:spPr>
+        <p:txBody>
+          <a:bodyPr wrap="square" anchor="t" lIns="0" rIns="0" tIns="0" bIns="0"/>
+          <a:lstStyle/>
+          <a:p>
+            <a:pPr algn="l"/>
+            <a:r>
+              <a:rPr sz="2200" b="0" i="0">
+                <a:solidFill>
+                  <a:srgbClr val="202122"/>
+                </a:solidFill>
+                <a:latin typeface="Calibri"/>
+              </a:rPr>
+              <a:t>Name two digital tools for managing documentation.</a:t>
+            </a:r>
+          </a:p>
+        </p:txBody>
+      </p:sp>
+      <p:sp>
+        <p:nvSpPr>
+          <p:cNvPr id="10" name="Oval 9"/>
+          <p:cNvSpPr/>
+          <p:nvPr/>
+        </p:nvSpPr>
+        <p:spPr>
+          <a:xfrm>
+            <a:off x="548640" y="4806695"/>
+            <a:ext cx="411480" cy="411480"/>
+          </a:xfrm>
+          <a:prstGeom prst="ellipse">
+            <a:avLst/>
+          </a:prstGeom>
+          <a:solidFill>
+            <a:srgbClr val="E0463A"/>
+          </a:solidFill>
+          <a:ln>
+            <a:noFill/>
+          </a:ln>
+          <a:effectLst/>
+        </p:spPr>
+        <p:style>
+          <a:lnRef idx="1">
+            <a:schemeClr val="accent1"/>
+          </a:lnRef>
+          <a:fillRef idx="3">
+            <a:schemeClr val="accent1"/>
+          </a:fillRef>
+          <a:effectRef idx="2">
+            <a:schemeClr val="accent1"/>
+          </a:effectRef>
+          <a:fontRef idx="minor">
+            <a:schemeClr val="lt1"/>
+          </a:fontRef>
+        </p:style>
+        <p:txBody>
+          <a:bodyPr rtlCol="0" anchor="ctr" lIns="0" rIns="0" tIns="0" bIns="0"/>
+          <a:lstStyle/>
+          <a:p>
+            <a:pPr algn="ctr"/>
+            <a:r>
+              <a:rPr sz="1400" b="1">
+                <a:solidFill>
+                  <a:srgbClr val="FFFFFF"/>
+                </a:solidFill>
+                <a:latin typeface="Calibri"/>
+              </a:rPr>
+              <a:t>3</a:t>
+            </a:r>
+          </a:p>
         </p:txBody>
       </p:sp>
       <p:sp>
@@ -7991,8 +9946,8 @@
         </p:nvSpPr>
         <p:spPr>
           <a:xfrm>
-            <a:off x="8503920" y="1874519"/>
-            <a:ext cx="2926080" cy="365760"/>
+            <a:off x="1234440" y="4788408"/>
+            <a:ext cx="10408615" cy="1429512"/>
           </a:xfrm>
           <a:prstGeom prst="rect">
             <a:avLst/>
@@ -8005,112 +9960,13 @@
           <a:p>
             <a:pPr algn="l"/>
             <a:r>
-              <a:rPr sz="1300" b="1" i="0">
-                <a:solidFill>
-                  <a:srgbClr val="A9C8F0"/>
-                </a:solidFill>
-                <a:latin typeface="Calibri"/>
-              </a:rPr>
-              <a:t>REVISE THIS TOPIC</a:t>
-            </a:r>
-          </a:p>
-        </p:txBody>
-      </p:sp>
-      <p:sp>
-        <p:nvSpPr>
-          <p:cNvPr id="12" name="TextBox 11"/>
-          <p:cNvSpPr txBox="1"/>
-          <p:nvPr/>
-        </p:nvSpPr>
-        <p:spPr>
-          <a:xfrm>
-            <a:off x="8503920" y="2286000"/>
-            <a:ext cx="2926080" cy="548640"/>
-          </a:xfrm>
-          <a:prstGeom prst="rect">
-            <a:avLst/>
-          </a:prstGeom>
-          <a:noFill/>
-        </p:spPr>
-        <p:txBody>
-          <a:bodyPr wrap="square" anchor="t" lIns="0" rIns="0" tIns="0" bIns="0"/>
-          <a:lstStyle/>
-          <a:p>
-            <a:pPr algn="l"/>
-            <a:r>
-              <a:rPr sz="1400" b="0" i="0">
-                <a:solidFill>
-                  <a:srgbClr val="FFFFFF"/>
-                </a:solidFill>
-                <a:latin typeface="Calibri"/>
-              </a:rPr>
-              <a:t>Revision notes for this lesson are on the study wiki:</a:t>
-            </a:r>
-          </a:p>
-        </p:txBody>
-      </p:sp>
-      <p:sp>
-        <p:nvSpPr>
-          <p:cNvPr id="13" name="TextBox 12"/>
-          <p:cNvSpPr txBox="1"/>
-          <p:nvPr/>
-        </p:nvSpPr>
-        <p:spPr>
-          <a:xfrm>
-            <a:off x="8503920" y="2926080"/>
-            <a:ext cx="2926080" cy="1463040"/>
-          </a:xfrm>
-          <a:prstGeom prst="rect">
-            <a:avLst/>
-          </a:prstGeom>
-          <a:noFill/>
-        </p:spPr>
-        <p:txBody>
-          <a:bodyPr wrap="square" anchor="t" lIns="0" rIns="0" tIns="0" bIns="0"/>
-          <a:lstStyle/>
-          <a:p>
-            <a:pPr algn="l"/>
-            <a:r>
-              <a:rPr sz="2000" b="1" i="0">
-                <a:solidFill>
-                  <a:srgbClr val="FFFFFF"/>
-                </a:solidFill>
-                <a:latin typeface="Cambria"/>
-              </a:rPr>
-              <a:t>Practical Criteria</a:t>
-            </a:r>
-          </a:p>
-        </p:txBody>
-      </p:sp>
-      <p:sp>
-        <p:nvSpPr>
-          <p:cNvPr id="14" name="TextBox 13"/>
-          <p:cNvSpPr txBox="1"/>
-          <p:nvPr/>
-        </p:nvSpPr>
-        <p:spPr>
-          <a:xfrm>
-            <a:off x="548640" y="5669280"/>
-            <a:ext cx="11094415" cy="548640"/>
-          </a:xfrm>
-          <a:prstGeom prst="rect">
-            <a:avLst/>
-          </a:prstGeom>
-          <a:noFill/>
-        </p:spPr>
-        <p:txBody>
-          <a:bodyPr wrap="square" anchor="t" lIns="0" rIns="0" tIns="0" bIns="0"/>
-          <a:lstStyle/>
-          <a:p>
-            <a:pPr algn="l"/>
-            <a:r>
-              <a:rPr sz="1200" b="0" i="0">
-                <a:solidFill>
-                  <a:srgbClr val="A9C8F0"/>
-                </a:solidFill>
-                <a:latin typeface="Calibri"/>
-              </a:rPr>
-              <a:t>https://lana6478.github.io/T-level-Design-Development-Engineering-Manufacturing/#/02-occupational-specialism/02-practical-criteria.md</a:t>
+              <a:rPr sz="2200" b="0" i="0">
+                <a:solidFill>
+                  <a:srgbClr val="202122"/>
+                </a:solidFill>
+                <a:latin typeface="Calibri"/>
+              </a:rPr>
+              <a:t>Which format suits a non-technical client?</a:t>
             </a:r>
           </a:p>
         </p:txBody>
